--- a/public/lessons/year-6-maths/autumn/week-9/complete-mixed-arithmetic-efficiently/teaching-powerpoint-v1.pptx
+++ b/public/lessons/year-6-maths/autumn/week-9/complete-mixed-arithmetic-efficiently/teaching-powerpoint-v1.pptx
@@ -2,24 +2,24 @@
 <file path=ppt/presentation.xml><?xml version="1.0" encoding="utf-8"?>
 <p:presentation xmlns:p="http://schemas.openxmlformats.org/presentationml/2006/main">
   <p:sldMasterIdLst>
-    <p:sldMasterId xmlns:r="http://schemas.openxmlformats.org/officeDocument/2006/relationships" id="2147483648" r:id="Rb8b3dafc91334270"/>
+    <p:sldMasterId xmlns:r="http://schemas.openxmlformats.org/officeDocument/2006/relationships" id="2147483648" r:id="R7ff87b61746b4ac3"/>
   </p:sldMasterIdLst>
   <p:notesMasterIdLst>
-    <p:notesMasterId xmlns:r="http://schemas.openxmlformats.org/officeDocument/2006/relationships" r:id="R7323ca0fc8d8487a"/>
+    <p:notesMasterId xmlns:r="http://schemas.openxmlformats.org/officeDocument/2006/relationships" r:id="R96fa3a7195654b02"/>
   </p:notesMasterIdLst>
   <p:sldIdLst>
-    <p:sldId xmlns:r="http://schemas.openxmlformats.org/officeDocument/2006/relationships" id="256" r:id="R99df94902de746f5"/>
-    <p:sldId xmlns:r="http://schemas.openxmlformats.org/officeDocument/2006/relationships" id="257" r:id="Rf93b32a8673046d7"/>
-    <p:sldId xmlns:r="http://schemas.openxmlformats.org/officeDocument/2006/relationships" id="258" r:id="Rbb6b4396215a4165"/>
-    <p:sldId xmlns:r="http://schemas.openxmlformats.org/officeDocument/2006/relationships" id="259" r:id="Rd3c3761665834b24"/>
-    <p:sldId xmlns:r="http://schemas.openxmlformats.org/officeDocument/2006/relationships" id="260" r:id="Rc179c0209aa1460e"/>
-    <p:sldId xmlns:r="http://schemas.openxmlformats.org/officeDocument/2006/relationships" id="261" r:id="Reba07e2318bd4b2d"/>
-    <p:sldId xmlns:r="http://schemas.openxmlformats.org/officeDocument/2006/relationships" id="262" r:id="Re267ec93e9e94e42"/>
-    <p:sldId xmlns:r="http://schemas.openxmlformats.org/officeDocument/2006/relationships" id="263" r:id="R83509c011b7f4a12"/>
-    <p:sldId xmlns:r="http://schemas.openxmlformats.org/officeDocument/2006/relationships" id="264" r:id="R1b95b0daed3646f4"/>
-    <p:sldId xmlns:r="http://schemas.openxmlformats.org/officeDocument/2006/relationships" id="265" r:id="R7314f855e2a4441d"/>
-    <p:sldId xmlns:r="http://schemas.openxmlformats.org/officeDocument/2006/relationships" id="266" r:id="R44419b6515a04b23"/>
-    <p:sldId xmlns:r="http://schemas.openxmlformats.org/officeDocument/2006/relationships" id="267" r:id="Re323374764bf4720"/>
+    <p:sldId xmlns:r="http://schemas.openxmlformats.org/officeDocument/2006/relationships" id="256" r:id="R25f46740c2b1462a"/>
+    <p:sldId xmlns:r="http://schemas.openxmlformats.org/officeDocument/2006/relationships" id="257" r:id="Re3f401a6f6fb46fb"/>
+    <p:sldId xmlns:r="http://schemas.openxmlformats.org/officeDocument/2006/relationships" id="258" r:id="Rb3867d6c529b460d"/>
+    <p:sldId xmlns:r="http://schemas.openxmlformats.org/officeDocument/2006/relationships" id="259" r:id="R41ffc36d0a2a4aa6"/>
+    <p:sldId xmlns:r="http://schemas.openxmlformats.org/officeDocument/2006/relationships" id="260" r:id="R347baffbc1784f75"/>
+    <p:sldId xmlns:r="http://schemas.openxmlformats.org/officeDocument/2006/relationships" id="261" r:id="R34e5cd67ef9b4703"/>
+    <p:sldId xmlns:r="http://schemas.openxmlformats.org/officeDocument/2006/relationships" id="262" r:id="R1917dcc7966c4bd3"/>
+    <p:sldId xmlns:r="http://schemas.openxmlformats.org/officeDocument/2006/relationships" id="263" r:id="R06fcff0ed7e14aa5"/>
+    <p:sldId xmlns:r="http://schemas.openxmlformats.org/officeDocument/2006/relationships" id="264" r:id="R1cb14c854f5e4d89"/>
+    <p:sldId xmlns:r="http://schemas.openxmlformats.org/officeDocument/2006/relationships" id="265" r:id="Rcba614aaff8948ac"/>
+    <p:sldId xmlns:r="http://schemas.openxmlformats.org/officeDocument/2006/relationships" id="266" r:id="Re93d6733a6114e3f"/>
+    <p:sldId xmlns:r="http://schemas.openxmlformats.org/officeDocument/2006/relationships" id="267" r:id="R270f2dceb6674949"/>
   </p:sldIdLst>
   <p:sldSz cx="12192000" cy="6858000"/>
   <p:notesSz cx="6858000" cy="9144000"/>
@@ -873,7 +873,7 @@
           <a:lstStyle xmlns:a="http://schemas.openxmlformats.org/drawingml/2006/main"/>
           <a:p xmlns:a="http://schemas.openxmlformats.org/drawingml/2006/main">
             <a:r>
-              <a:t>I do. Reveal the question, setup and each calculation stage one click at a time. Pupils watch before copying. Model answer: 158.8.</a:t>
+              <a:t>I do. Reveal the question, then reveal each mathematical change one click at a time. Point to the numbers and operation that changed before moving to the next line. Final answer: 158.8.</a:t>
             </a:r>
           </a:p>
         </p:txBody>
@@ -1291,7 +1291,7 @@
   </p:cSld>
   <p:clrMap bg1="lt1" tx1="dk1" bg2="lt2" tx2="dk2" accent1="accent1" accent2="accent2" accent3="accent3" accent4="accent4" accent5="accent5" accent6="accent6" hlink="hlink" folHlink="folHlink"/>
   <p:sldLayoutIdLst>
-    <p:sldLayoutId xmlns:r="http://schemas.openxmlformats.org/officeDocument/2006/relationships" id="2147483649" r:id="R1664185628314e44"/>
+    <p:sldLayoutId xmlns:r="http://schemas.openxmlformats.org/officeDocument/2006/relationships" id="2147483649" r:id="R3b187f3f1b0e49e9"/>
   </p:sldLayoutIdLst>
   <p:txStyles>
     <p:titleStyle>
@@ -1842,7 +1842,7 @@
           <p:cNvPr id="12" name="">
             <a:extLst xmlns:a="http://schemas.openxmlformats.org/drawingml/2006/main">
               <a:ext uri="{FF2B5EF4-FFF2-40B4-BE49-F238E27FC236}">
-                <a16:creationId xmlns:a16="http://schemas.microsoft.com/office/drawing/2014/main" id="{96D814E1-7013-4EFA-AB7A-DBB558F3FD1C}"/>
+                <a16:creationId xmlns:a16="http://schemas.microsoft.com/office/drawing/2014/main" id="{8A65FC7A-2C20-4599-BCB8-6970663090FA}"/>
               </a:ext>
             </a:extLst>
           </p:cNvPr>
@@ -1874,7 +1874,7 @@
           <p:cNvPr id="2" name="">
             <a:extLst xmlns:a="http://schemas.openxmlformats.org/drawingml/2006/main">
               <a:ext uri="{FF2B5EF4-FFF2-40B4-BE49-F238E27FC236}">
-                <a16:creationId xmlns:a16="http://schemas.microsoft.com/office/drawing/2014/main" id="{DC120C90-E44F-408E-94C2-ED6DBEC016A5}"/>
+                <a16:creationId xmlns:a16="http://schemas.microsoft.com/office/drawing/2014/main" id="{9E687AF8-D928-45DE-88CE-1CD266AC9020}"/>
               </a:ext>
             </a:extLst>
           </p:cNvPr>
@@ -1931,7 +1931,7 @@
           <p:cNvPr id="3" name="">
             <a:extLst xmlns:a="http://schemas.openxmlformats.org/drawingml/2006/main">
               <a:ext uri="{FF2B5EF4-FFF2-40B4-BE49-F238E27FC236}">
-                <a16:creationId xmlns:a16="http://schemas.microsoft.com/office/drawing/2014/main" id="{029FE897-0403-457C-983C-8CE749E9134F}"/>
+                <a16:creationId xmlns:a16="http://schemas.microsoft.com/office/drawing/2014/main" id="{D9A2C4CB-5827-4604-A848-CCA7259F8B3E}"/>
               </a:ext>
             </a:extLst>
           </p:cNvPr>
@@ -1965,7 +1965,7 @@
           <p:cNvPr id="4" name="">
             <a:extLst xmlns:a="http://schemas.openxmlformats.org/drawingml/2006/main">
               <a:ext uri="{FF2B5EF4-FFF2-40B4-BE49-F238E27FC236}">
-                <a16:creationId xmlns:a16="http://schemas.microsoft.com/office/drawing/2014/main" id="{2F552ECF-A0CB-48B3-A443-F3CD318138C3}"/>
+                <a16:creationId xmlns:a16="http://schemas.microsoft.com/office/drawing/2014/main" id="{2FDFFF6F-BAFA-43C4-ABEE-9348AF30886C}"/>
               </a:ext>
             </a:extLst>
           </p:cNvPr>
@@ -2022,7 +2022,7 @@
           <p:cNvPr id="5" name="">
             <a:extLst xmlns:a="http://schemas.openxmlformats.org/drawingml/2006/main">
               <a:ext uri="{FF2B5EF4-FFF2-40B4-BE49-F238E27FC236}">
-                <a16:creationId xmlns:a16="http://schemas.microsoft.com/office/drawing/2014/main" id="{49294A89-EA2D-47A0-A3DD-89387D96F37B}"/>
+                <a16:creationId xmlns:a16="http://schemas.microsoft.com/office/drawing/2014/main" id="{4E4D24B5-EEBC-401C-84AA-CA6F1014CB3A}"/>
               </a:ext>
             </a:extLst>
           </p:cNvPr>
@@ -2079,7 +2079,7 @@
           <p:cNvPr id="6" name="">
             <a:extLst xmlns:a="http://schemas.openxmlformats.org/drawingml/2006/main">
               <a:ext uri="{FF2B5EF4-FFF2-40B4-BE49-F238E27FC236}">
-                <a16:creationId xmlns:a16="http://schemas.microsoft.com/office/drawing/2014/main" id="{85AC9B50-957B-43C5-A65A-D08F28322B3B}"/>
+                <a16:creationId xmlns:a16="http://schemas.microsoft.com/office/drawing/2014/main" id="{DA499F89-C983-4A57-826F-4A751DA92683}"/>
               </a:ext>
             </a:extLst>
           </p:cNvPr>
@@ -2113,7 +2113,7 @@
           <p:cNvPr id="7" name="">
             <a:extLst xmlns:a="http://schemas.openxmlformats.org/drawingml/2006/main">
               <a:ext uri="{FF2B5EF4-FFF2-40B4-BE49-F238E27FC236}">
-                <a16:creationId xmlns:a16="http://schemas.microsoft.com/office/drawing/2014/main" id="{C53D19D8-14E1-4D15-B7FA-200AC0EA13DB}"/>
+                <a16:creationId xmlns:a16="http://schemas.microsoft.com/office/drawing/2014/main" id="{48335483-8140-484E-B006-2A14A20E6E4A}"/>
               </a:ext>
             </a:extLst>
           </p:cNvPr>
@@ -2170,7 +2170,7 @@
           <p:cNvPr id="8" name="">
             <a:extLst xmlns:a="http://schemas.openxmlformats.org/drawingml/2006/main">
               <a:ext uri="{FF2B5EF4-FFF2-40B4-BE49-F238E27FC236}">
-                <a16:creationId xmlns:a16="http://schemas.microsoft.com/office/drawing/2014/main" id="{428FC54D-75A0-415A-8DBA-485576816171}"/>
+                <a16:creationId xmlns:a16="http://schemas.microsoft.com/office/drawing/2014/main" id="{BECA7CE4-E796-44D9-A1D8-2FEE3956C5E4}"/>
               </a:ext>
             </a:extLst>
           </p:cNvPr>
@@ -2227,7 +2227,7 @@
           <p:cNvPr id="9" name="">
             <a:extLst xmlns:a="http://schemas.openxmlformats.org/drawingml/2006/main">
               <a:ext uri="{FF2B5EF4-FFF2-40B4-BE49-F238E27FC236}">
-                <a16:creationId xmlns:a16="http://schemas.microsoft.com/office/drawing/2014/main" id="{A535BEDF-21C2-4D93-B88C-619A10801E95}"/>
+                <a16:creationId xmlns:a16="http://schemas.microsoft.com/office/drawing/2014/main" id="{5B6E3068-0BC0-4728-8253-3D2BE2053537}"/>
               </a:ext>
             </a:extLst>
           </p:cNvPr>
@@ -2284,7 +2284,7 @@
           <p:cNvPr id="10" name="">
             <a:extLst xmlns:a="http://schemas.openxmlformats.org/drawingml/2006/main">
               <a:ext uri="{FF2B5EF4-FFF2-40B4-BE49-F238E27FC236}">
-                <a16:creationId xmlns:a16="http://schemas.microsoft.com/office/drawing/2014/main" id="{A612B257-7217-4A54-8219-54395E168200}"/>
+                <a16:creationId xmlns:a16="http://schemas.microsoft.com/office/drawing/2014/main" id="{A7EAC582-37F8-412D-9494-D12A01AF2FC7}"/>
               </a:ext>
             </a:extLst>
           </p:cNvPr>
@@ -2341,7 +2341,7 @@
           <p:cNvPr id="11" name="">
             <a:extLst xmlns:a="http://schemas.openxmlformats.org/drawingml/2006/main">
               <a:ext uri="{FF2B5EF4-FFF2-40B4-BE49-F238E27FC236}">
-                <a16:creationId xmlns:a16="http://schemas.microsoft.com/office/drawing/2014/main" id="{3929596E-4BA1-46EE-BE2C-CAD00BB6A80E}"/>
+                <a16:creationId xmlns:a16="http://schemas.microsoft.com/office/drawing/2014/main" id="{ADA8D43E-50BD-476B-A76F-29CA0D6E5D64}"/>
               </a:ext>
             </a:extLst>
           </p:cNvPr>
@@ -2396,7 +2396,7 @@
     </p:spTree>
     <p:extLst>
       <p:ext uri="{BB962C8B-B14F-4D97-AF65-F5344CB8AC3E}">
-        <p14:creationId xmlns:p14="http://schemas.microsoft.com/office/powerpoint/2010/main" val="1260178466"/>
+        <p14:creationId xmlns:p14="http://schemas.microsoft.com/office/powerpoint/2010/main" val="1785708991"/>
       </p:ext>
     </p:extLst>
   </p:cSld>
@@ -2427,7 +2427,7 @@
           <p:cNvPr id="14" name="">
             <a:extLst xmlns:a="http://schemas.openxmlformats.org/drawingml/2006/main">
               <a:ext uri="{FF2B5EF4-FFF2-40B4-BE49-F238E27FC236}">
-                <a16:creationId xmlns:a16="http://schemas.microsoft.com/office/drawing/2014/main" id="{F1CF7E6E-D472-4AB4-A159-9C70CE190A5D}"/>
+                <a16:creationId xmlns:a16="http://schemas.microsoft.com/office/drawing/2014/main" id="{3C0972FD-FD02-42AB-953E-B17FBAD8A509}"/>
               </a:ext>
             </a:extLst>
           </p:cNvPr>
@@ -2459,7 +2459,7 @@
           <p:cNvPr id="2" name="">
             <a:extLst xmlns:a="http://schemas.openxmlformats.org/drawingml/2006/main">
               <a:ext uri="{FF2B5EF4-FFF2-40B4-BE49-F238E27FC236}">
-                <a16:creationId xmlns:a16="http://schemas.microsoft.com/office/drawing/2014/main" id="{4780B050-4B4E-4129-986A-212C407C9D99}"/>
+                <a16:creationId xmlns:a16="http://schemas.microsoft.com/office/drawing/2014/main" id="{3756E33A-DF98-4762-ACB4-E20FDCA3E391}"/>
               </a:ext>
             </a:extLst>
           </p:cNvPr>
@@ -2516,7 +2516,7 @@
           <p:cNvPr id="3" name="">
             <a:extLst xmlns:a="http://schemas.openxmlformats.org/drawingml/2006/main">
               <a:ext uri="{FF2B5EF4-FFF2-40B4-BE49-F238E27FC236}">
-                <a16:creationId xmlns:a16="http://schemas.microsoft.com/office/drawing/2014/main" id="{B8082A91-82A9-44C2-8E61-99D8F7BE7044}"/>
+                <a16:creationId xmlns:a16="http://schemas.microsoft.com/office/drawing/2014/main" id="{88A2A3B3-374A-46F7-94BA-8878E872142D}"/>
               </a:ext>
             </a:extLst>
           </p:cNvPr>
@@ -2548,7 +2548,7 @@
           <p:cNvPr id="4" name="">
             <a:extLst xmlns:a="http://schemas.openxmlformats.org/drawingml/2006/main">
               <a:ext uri="{FF2B5EF4-FFF2-40B4-BE49-F238E27FC236}">
-                <a16:creationId xmlns:a16="http://schemas.microsoft.com/office/drawing/2014/main" id="{429FF18B-3AF4-4BD5-A921-9BF787C04CA9}"/>
+                <a16:creationId xmlns:a16="http://schemas.microsoft.com/office/drawing/2014/main" id="{E2A95E35-3DE3-46B7-826E-390722A6044B}"/>
               </a:ext>
             </a:extLst>
           </p:cNvPr>
@@ -2605,7 +2605,7 @@
           <p:cNvPr id="5" name="">
             <a:extLst xmlns:a="http://schemas.openxmlformats.org/drawingml/2006/main">
               <a:ext uri="{FF2B5EF4-FFF2-40B4-BE49-F238E27FC236}">
-                <a16:creationId xmlns:a16="http://schemas.microsoft.com/office/drawing/2014/main" id="{F9B77C78-3D02-4066-BADB-72BF6454FD33}"/>
+                <a16:creationId xmlns:a16="http://schemas.microsoft.com/office/drawing/2014/main" id="{2DC07DAA-D3C5-44F6-87BD-3B55E2CB9E80}"/>
               </a:ext>
             </a:extLst>
           </p:cNvPr>
@@ -2662,7 +2662,7 @@
           <p:cNvPr id="6" name="">
             <a:extLst xmlns:a="http://schemas.openxmlformats.org/drawingml/2006/main">
               <a:ext uri="{FF2B5EF4-FFF2-40B4-BE49-F238E27FC236}">
-                <a16:creationId xmlns:a16="http://schemas.microsoft.com/office/drawing/2014/main" id="{0E1E2C2B-4883-4BD5-937D-F0E3DB5F73A6}"/>
+                <a16:creationId xmlns:a16="http://schemas.microsoft.com/office/drawing/2014/main" id="{810DD4FA-E7DF-40CE-8079-62A5B3733C19}"/>
               </a:ext>
             </a:extLst>
           </p:cNvPr>
@@ -2719,7 +2719,7 @@
           <p:cNvPr id="7" name="">
             <a:extLst xmlns:a="http://schemas.openxmlformats.org/drawingml/2006/main">
               <a:ext uri="{FF2B5EF4-FFF2-40B4-BE49-F238E27FC236}">
-                <a16:creationId xmlns:a16="http://schemas.microsoft.com/office/drawing/2014/main" id="{EA59213F-87C3-485C-9CE9-F1C004EC453D}"/>
+                <a16:creationId xmlns:a16="http://schemas.microsoft.com/office/drawing/2014/main" id="{70F3A6BC-3536-45E1-8FC9-31A7A0C0C1E3}"/>
               </a:ext>
             </a:extLst>
           </p:cNvPr>
@@ -2751,7 +2751,7 @@
           <p:cNvPr id="8" name="">
             <a:extLst xmlns:a="http://schemas.openxmlformats.org/drawingml/2006/main">
               <a:ext uri="{FF2B5EF4-FFF2-40B4-BE49-F238E27FC236}">
-                <a16:creationId xmlns:a16="http://schemas.microsoft.com/office/drawing/2014/main" id="{5BF7C79A-1A4F-4E29-9962-72F438CC31DA}"/>
+                <a16:creationId xmlns:a16="http://schemas.microsoft.com/office/drawing/2014/main" id="{04D3947E-B2F9-46B4-92FC-4D7920F1A846}"/>
               </a:ext>
             </a:extLst>
           </p:cNvPr>
@@ -2808,7 +2808,7 @@
           <p:cNvPr id="9" name="">
             <a:extLst xmlns:a="http://schemas.openxmlformats.org/drawingml/2006/main">
               <a:ext uri="{FF2B5EF4-FFF2-40B4-BE49-F238E27FC236}">
-                <a16:creationId xmlns:a16="http://schemas.microsoft.com/office/drawing/2014/main" id="{97779137-7CF8-4DC5-95E5-AEBE8B99FDB3}"/>
+                <a16:creationId xmlns:a16="http://schemas.microsoft.com/office/drawing/2014/main" id="{19009B95-FC54-43BC-8C26-CBF526EFD8DA}"/>
               </a:ext>
             </a:extLst>
           </p:cNvPr>
@@ -2865,7 +2865,7 @@
           <p:cNvPr id="10" name="">
             <a:extLst xmlns:a="http://schemas.openxmlformats.org/drawingml/2006/main">
               <a:ext uri="{FF2B5EF4-FFF2-40B4-BE49-F238E27FC236}">
-                <a16:creationId xmlns:a16="http://schemas.microsoft.com/office/drawing/2014/main" id="{277B3527-9E9F-4D72-A2DC-5A0790C3A74D}"/>
+                <a16:creationId xmlns:a16="http://schemas.microsoft.com/office/drawing/2014/main" id="{7CA301D3-DD58-4B5D-AE5F-2B59F4334B5C}"/>
               </a:ext>
             </a:extLst>
           </p:cNvPr>
@@ -2922,7 +2922,7 @@
           <p:cNvPr id="11" name="">
             <a:extLst xmlns:a="http://schemas.openxmlformats.org/drawingml/2006/main">
               <a:ext uri="{FF2B5EF4-FFF2-40B4-BE49-F238E27FC236}">
-                <a16:creationId xmlns:a16="http://schemas.microsoft.com/office/drawing/2014/main" id="{B94C55B3-67A0-4806-9350-F9D586D41A38}"/>
+                <a16:creationId xmlns:a16="http://schemas.microsoft.com/office/drawing/2014/main" id="{6E54B6D3-36F2-4B2F-8225-AF34771B52FA}"/>
               </a:ext>
             </a:extLst>
           </p:cNvPr>
@@ -2979,7 +2979,7 @@
           <p:cNvPr id="12" name="">
             <a:extLst xmlns:a="http://schemas.openxmlformats.org/drawingml/2006/main">
               <a:ext uri="{FF2B5EF4-FFF2-40B4-BE49-F238E27FC236}">
-                <a16:creationId xmlns:a16="http://schemas.microsoft.com/office/drawing/2014/main" id="{1760DE50-6A58-4AD1-83E4-FC042B2AA78B}"/>
+                <a16:creationId xmlns:a16="http://schemas.microsoft.com/office/drawing/2014/main" id="{9CAC5931-BBCD-454E-A8BE-E4C4AA289814}"/>
               </a:ext>
             </a:extLst>
           </p:cNvPr>
@@ -3036,7 +3036,7 @@
           <p:cNvPr id="13" name="">
             <a:extLst xmlns:a="http://schemas.openxmlformats.org/drawingml/2006/main">
               <a:ext uri="{FF2B5EF4-FFF2-40B4-BE49-F238E27FC236}">
-                <a16:creationId xmlns:a16="http://schemas.microsoft.com/office/drawing/2014/main" id="{57FEF638-28F5-4282-9524-5F0B753383FE}"/>
+                <a16:creationId xmlns:a16="http://schemas.microsoft.com/office/drawing/2014/main" id="{8CEA6A02-4397-4318-A72C-FC0F8593A890}"/>
               </a:ext>
             </a:extLst>
           </p:cNvPr>
@@ -3091,7 +3091,7 @@
     </p:spTree>
     <p:extLst>
       <p:ext uri="{BB962C8B-B14F-4D97-AF65-F5344CB8AC3E}">
-        <p14:creationId xmlns:p14="http://schemas.microsoft.com/office/powerpoint/2010/main" val="33468210"/>
+        <p14:creationId xmlns:p14="http://schemas.microsoft.com/office/powerpoint/2010/main" val="1466820627"/>
       </p:ext>
     </p:extLst>
   </p:cSld>
@@ -3292,7 +3292,7 @@
           <p:cNvPr id="19" name="">
             <a:extLst xmlns:a="http://schemas.openxmlformats.org/drawingml/2006/main">
               <a:ext uri="{FF2B5EF4-FFF2-40B4-BE49-F238E27FC236}">
-                <a16:creationId xmlns:a16="http://schemas.microsoft.com/office/drawing/2014/main" id="{A382B20D-F870-46E4-908A-2E885D4826E3}"/>
+                <a16:creationId xmlns:a16="http://schemas.microsoft.com/office/drawing/2014/main" id="{920FBC00-C32A-45B9-A63D-45BC6475AC12}"/>
               </a:ext>
             </a:extLst>
           </p:cNvPr>
@@ -3324,7 +3324,7 @@
           <p:cNvPr id="2" name="">
             <a:extLst xmlns:a="http://schemas.openxmlformats.org/drawingml/2006/main">
               <a:ext uri="{FF2B5EF4-FFF2-40B4-BE49-F238E27FC236}">
-                <a16:creationId xmlns:a16="http://schemas.microsoft.com/office/drawing/2014/main" id="{02437D5E-92D7-4777-AF37-5F61C5273DEB}"/>
+                <a16:creationId xmlns:a16="http://schemas.microsoft.com/office/drawing/2014/main" id="{9CD846F3-4571-454B-82D3-13EDB37196E9}"/>
               </a:ext>
             </a:extLst>
           </p:cNvPr>
@@ -3381,7 +3381,7 @@
           <p:cNvPr id="3" name="">
             <a:extLst xmlns:a="http://schemas.openxmlformats.org/drawingml/2006/main">
               <a:ext uri="{FF2B5EF4-FFF2-40B4-BE49-F238E27FC236}">
-                <a16:creationId xmlns:a16="http://schemas.microsoft.com/office/drawing/2014/main" id="{8DAF2A0F-29A9-41CB-9B60-5C9B5AF41243}"/>
+                <a16:creationId xmlns:a16="http://schemas.microsoft.com/office/drawing/2014/main" id="{A2779A52-44ED-436A-ABE0-067845DC3E54}"/>
               </a:ext>
             </a:extLst>
           </p:cNvPr>
@@ -3413,7 +3413,7 @@
           <p:cNvPr id="4" name="">
             <a:extLst xmlns:a="http://schemas.openxmlformats.org/drawingml/2006/main">
               <a:ext uri="{FF2B5EF4-FFF2-40B4-BE49-F238E27FC236}">
-                <a16:creationId xmlns:a16="http://schemas.microsoft.com/office/drawing/2014/main" id="{AFE46B3C-C408-4024-893D-05FBEA0B4F49}"/>
+                <a16:creationId xmlns:a16="http://schemas.microsoft.com/office/drawing/2014/main" id="{AB3D0077-EC8F-4A4F-AD1F-B696D918480E}"/>
               </a:ext>
             </a:extLst>
           </p:cNvPr>
@@ -3470,7 +3470,7 @@
           <p:cNvPr id="5" name="">
             <a:extLst xmlns:a="http://schemas.openxmlformats.org/drawingml/2006/main">
               <a:ext uri="{FF2B5EF4-FFF2-40B4-BE49-F238E27FC236}">
-                <a16:creationId xmlns:a16="http://schemas.microsoft.com/office/drawing/2014/main" id="{1F3C5BD3-69E3-4ACE-8C03-7567EC44B9ED}"/>
+                <a16:creationId xmlns:a16="http://schemas.microsoft.com/office/drawing/2014/main" id="{EDC0A80C-EFB9-4662-A333-0478E9D74C32}"/>
               </a:ext>
             </a:extLst>
           </p:cNvPr>
@@ -3527,7 +3527,7 @@
           <p:cNvPr id="6" name="">
             <a:extLst xmlns:a="http://schemas.openxmlformats.org/drawingml/2006/main">
               <a:ext uri="{FF2B5EF4-FFF2-40B4-BE49-F238E27FC236}">
-                <a16:creationId xmlns:a16="http://schemas.microsoft.com/office/drawing/2014/main" id="{1F43F659-1391-4487-99EA-DFCE67C5AECF}"/>
+                <a16:creationId xmlns:a16="http://schemas.microsoft.com/office/drawing/2014/main" id="{5BA68F84-B104-45CC-9ACA-9FDF8EFED98C}"/>
               </a:ext>
             </a:extLst>
           </p:cNvPr>
@@ -3584,7 +3584,7 @@
           <p:cNvPr id="7" name="">
             <a:extLst xmlns:a="http://schemas.openxmlformats.org/drawingml/2006/main">
               <a:ext uri="{FF2B5EF4-FFF2-40B4-BE49-F238E27FC236}">
-                <a16:creationId xmlns:a16="http://schemas.microsoft.com/office/drawing/2014/main" id="{BF879AF4-A502-4E60-8AF4-663BE931EDEB}"/>
+                <a16:creationId xmlns:a16="http://schemas.microsoft.com/office/drawing/2014/main" id="{AE5D2BAE-9F72-4EE6-BDDE-F0541CB3F8E3}"/>
               </a:ext>
             </a:extLst>
           </p:cNvPr>
@@ -3616,7 +3616,7 @@
           <p:cNvPr id="8" name="">
             <a:extLst xmlns:a="http://schemas.openxmlformats.org/drawingml/2006/main">
               <a:ext uri="{FF2B5EF4-FFF2-40B4-BE49-F238E27FC236}">
-                <a16:creationId xmlns:a16="http://schemas.microsoft.com/office/drawing/2014/main" id="{712A6566-81D2-441B-819E-A6C0882A63C3}"/>
+                <a16:creationId xmlns:a16="http://schemas.microsoft.com/office/drawing/2014/main" id="{F041E61E-51B1-4BE6-B01B-ABFB39514D48}"/>
               </a:ext>
             </a:extLst>
           </p:cNvPr>
@@ -3673,7 +3673,7 @@
           <p:cNvPr id="9" name="">
             <a:extLst xmlns:a="http://schemas.openxmlformats.org/drawingml/2006/main">
               <a:ext uri="{FF2B5EF4-FFF2-40B4-BE49-F238E27FC236}">
-                <a16:creationId xmlns:a16="http://schemas.microsoft.com/office/drawing/2014/main" id="{E815F4F4-ACCB-4F32-93AF-EC39EE863F30}"/>
+                <a16:creationId xmlns:a16="http://schemas.microsoft.com/office/drawing/2014/main" id="{46180EA9-1BE3-43AE-809C-839FCD37C9E2}"/>
               </a:ext>
             </a:extLst>
           </p:cNvPr>
@@ -3730,7 +3730,7 @@
           <p:cNvPr id="10" name="">
             <a:extLst xmlns:a="http://schemas.openxmlformats.org/drawingml/2006/main">
               <a:ext uri="{FF2B5EF4-FFF2-40B4-BE49-F238E27FC236}">
-                <a16:creationId xmlns:a16="http://schemas.microsoft.com/office/drawing/2014/main" id="{32311274-C808-48BD-A6F2-F660EE992EDA}"/>
+                <a16:creationId xmlns:a16="http://schemas.microsoft.com/office/drawing/2014/main" id="{8BD4A516-852D-41D4-B9F9-BCD5C5393FB1}"/>
               </a:ext>
             </a:extLst>
           </p:cNvPr>
@@ -3787,7 +3787,7 @@
           <p:cNvPr id="11" name="">
             <a:extLst xmlns:a="http://schemas.openxmlformats.org/drawingml/2006/main">
               <a:ext uri="{FF2B5EF4-FFF2-40B4-BE49-F238E27FC236}">
-                <a16:creationId xmlns:a16="http://schemas.microsoft.com/office/drawing/2014/main" id="{79E3B4A7-C9D0-4E98-86B7-C6AE51D59B17}"/>
+                <a16:creationId xmlns:a16="http://schemas.microsoft.com/office/drawing/2014/main" id="{B29D1525-355C-4BA8-BDDE-B9A3B6A1F60D}"/>
               </a:ext>
             </a:extLst>
           </p:cNvPr>
@@ -3821,7 +3821,7 @@
           <p:cNvPr id="12" name="">
             <a:extLst xmlns:a="http://schemas.openxmlformats.org/drawingml/2006/main">
               <a:ext uri="{FF2B5EF4-FFF2-40B4-BE49-F238E27FC236}">
-                <a16:creationId xmlns:a16="http://schemas.microsoft.com/office/drawing/2014/main" id="{873FAA04-3BD8-4B18-9F9F-DCC8A0AC6A45}"/>
+                <a16:creationId xmlns:a16="http://schemas.microsoft.com/office/drawing/2014/main" id="{AC917098-B99F-43D2-AC5E-EDB6FDCBB01F}"/>
               </a:ext>
             </a:extLst>
           </p:cNvPr>
@@ -3878,7 +3878,7 @@
           <p:cNvPr id="13" name="">
             <a:extLst xmlns:a="http://schemas.openxmlformats.org/drawingml/2006/main">
               <a:ext uri="{FF2B5EF4-FFF2-40B4-BE49-F238E27FC236}">
-                <a16:creationId xmlns:a16="http://schemas.microsoft.com/office/drawing/2014/main" id="{368F2E23-8342-43F3-9BCF-15C58C2BF2C3}"/>
+                <a16:creationId xmlns:a16="http://schemas.microsoft.com/office/drawing/2014/main" id="{F8584F27-5F60-4F93-A423-776E237DA853}"/>
               </a:ext>
             </a:extLst>
           </p:cNvPr>
@@ -3935,7 +3935,7 @@
           <p:cNvPr id="14" name="">
             <a:extLst xmlns:a="http://schemas.openxmlformats.org/drawingml/2006/main">
               <a:ext uri="{FF2B5EF4-FFF2-40B4-BE49-F238E27FC236}">
-                <a16:creationId xmlns:a16="http://schemas.microsoft.com/office/drawing/2014/main" id="{C92894F3-E5E6-4DD6-B55A-FEA98551B548}"/>
+                <a16:creationId xmlns:a16="http://schemas.microsoft.com/office/drawing/2014/main" id="{2D381076-A39E-4B14-A074-57868E2B5ADE}"/>
               </a:ext>
             </a:extLst>
           </p:cNvPr>
@@ -3992,7 +3992,7 @@
           <p:cNvPr id="15" name="">
             <a:extLst xmlns:a="http://schemas.openxmlformats.org/drawingml/2006/main">
               <a:ext uri="{FF2B5EF4-FFF2-40B4-BE49-F238E27FC236}">
-                <a16:creationId xmlns:a16="http://schemas.microsoft.com/office/drawing/2014/main" id="{D2DDD7BE-8B4F-4EB0-A5B6-3B302ACD6160}"/>
+                <a16:creationId xmlns:a16="http://schemas.microsoft.com/office/drawing/2014/main" id="{72A871B0-E522-4C30-B57C-A6AB49B252DC}"/>
               </a:ext>
             </a:extLst>
           </p:cNvPr>
@@ -4026,7 +4026,7 @@
           <p:cNvPr id="16" name="">
             <a:extLst xmlns:a="http://schemas.openxmlformats.org/drawingml/2006/main">
               <a:ext uri="{FF2B5EF4-FFF2-40B4-BE49-F238E27FC236}">
-                <a16:creationId xmlns:a16="http://schemas.microsoft.com/office/drawing/2014/main" id="{2EEB725A-75A4-4216-B49D-2232D0C95908}"/>
+                <a16:creationId xmlns:a16="http://schemas.microsoft.com/office/drawing/2014/main" id="{795889BE-30D3-4267-AAA3-82B614C4B2AC}"/>
               </a:ext>
             </a:extLst>
           </p:cNvPr>
@@ -4083,7 +4083,7 @@
           <p:cNvPr id="17" name="">
             <a:extLst xmlns:a="http://schemas.openxmlformats.org/drawingml/2006/main">
               <a:ext uri="{FF2B5EF4-FFF2-40B4-BE49-F238E27FC236}">
-                <a16:creationId xmlns:a16="http://schemas.microsoft.com/office/drawing/2014/main" id="{001370A8-0F17-4D49-8501-BFA2CC3339D6}"/>
+                <a16:creationId xmlns:a16="http://schemas.microsoft.com/office/drawing/2014/main" id="{65DCACEA-3100-421D-909A-7943032EB736}"/>
               </a:ext>
             </a:extLst>
           </p:cNvPr>
@@ -4140,7 +4140,7 @@
           <p:cNvPr id="18" name="">
             <a:extLst xmlns:a="http://schemas.openxmlformats.org/drawingml/2006/main">
               <a:ext uri="{FF2B5EF4-FFF2-40B4-BE49-F238E27FC236}">
-                <a16:creationId xmlns:a16="http://schemas.microsoft.com/office/drawing/2014/main" id="{CC1B5374-FC3E-4AEA-8799-58A147DEF82E}"/>
+                <a16:creationId xmlns:a16="http://schemas.microsoft.com/office/drawing/2014/main" id="{2E073E24-EAF7-4DA7-A529-9C0A810D4478}"/>
               </a:ext>
             </a:extLst>
           </p:cNvPr>
@@ -4195,7 +4195,7 @@
     </p:spTree>
     <p:extLst>
       <p:ext uri="{BB962C8B-B14F-4D97-AF65-F5344CB8AC3E}">
-        <p14:creationId xmlns:p14="http://schemas.microsoft.com/office/powerpoint/2010/main" val="1703107080"/>
+        <p14:creationId xmlns:p14="http://schemas.microsoft.com/office/powerpoint/2010/main" val="357409944"/>
       </p:ext>
     </p:extLst>
   </p:cSld>
@@ -4350,7 +4350,7 @@
           <p:cNvPr id="23" name="">
             <a:extLst xmlns:a="http://schemas.openxmlformats.org/drawingml/2006/main">
               <a:ext uri="{FF2B5EF4-FFF2-40B4-BE49-F238E27FC236}">
-                <a16:creationId xmlns:a16="http://schemas.microsoft.com/office/drawing/2014/main" id="{8ABB4D92-83BA-403B-8F5C-5B003DEC1963}"/>
+                <a16:creationId xmlns:a16="http://schemas.microsoft.com/office/drawing/2014/main" id="{46133492-68B5-4DAA-9F65-CD9295392353}"/>
               </a:ext>
             </a:extLst>
           </p:cNvPr>
@@ -4382,7 +4382,7 @@
           <p:cNvPr id="2" name="">
             <a:extLst xmlns:a="http://schemas.openxmlformats.org/drawingml/2006/main">
               <a:ext uri="{FF2B5EF4-FFF2-40B4-BE49-F238E27FC236}">
-                <a16:creationId xmlns:a16="http://schemas.microsoft.com/office/drawing/2014/main" id="{0A16993D-CEEC-4094-988F-59E3CE41606D}"/>
+                <a16:creationId xmlns:a16="http://schemas.microsoft.com/office/drawing/2014/main" id="{62E7F5EA-32A5-4A6B-8926-2C6BF0A4F736}"/>
               </a:ext>
             </a:extLst>
           </p:cNvPr>
@@ -4439,7 +4439,7 @@
           <p:cNvPr id="3" name="">
             <a:extLst xmlns:a="http://schemas.openxmlformats.org/drawingml/2006/main">
               <a:ext uri="{FF2B5EF4-FFF2-40B4-BE49-F238E27FC236}">
-                <a16:creationId xmlns:a16="http://schemas.microsoft.com/office/drawing/2014/main" id="{91C5CD4B-FD29-47A4-A63F-1B9D42B09A75}"/>
+                <a16:creationId xmlns:a16="http://schemas.microsoft.com/office/drawing/2014/main" id="{B701D04F-0AD6-4C89-9414-AB85BF5B8A33}"/>
               </a:ext>
             </a:extLst>
           </p:cNvPr>
@@ -4471,7 +4471,7 @@
           <p:cNvPr id="4" name="">
             <a:extLst xmlns:a="http://schemas.openxmlformats.org/drawingml/2006/main">
               <a:ext uri="{FF2B5EF4-FFF2-40B4-BE49-F238E27FC236}">
-                <a16:creationId xmlns:a16="http://schemas.microsoft.com/office/drawing/2014/main" id="{3EB018BC-279F-4DCF-823A-CF5685DD5128}"/>
+                <a16:creationId xmlns:a16="http://schemas.microsoft.com/office/drawing/2014/main" id="{78A441EB-D747-4B6A-BD60-2F4484B84C12}"/>
               </a:ext>
             </a:extLst>
           </p:cNvPr>
@@ -4528,7 +4528,7 @@
           <p:cNvPr id="5" name="">
             <a:extLst xmlns:a="http://schemas.openxmlformats.org/drawingml/2006/main">
               <a:ext uri="{FF2B5EF4-FFF2-40B4-BE49-F238E27FC236}">
-                <a16:creationId xmlns:a16="http://schemas.microsoft.com/office/drawing/2014/main" id="{57C3C45F-FCD3-4FAE-9118-4AD0310E8774}"/>
+                <a16:creationId xmlns:a16="http://schemas.microsoft.com/office/drawing/2014/main" id="{E1B3EA87-9D6E-4900-B7B2-2E7FD4BB53E3}"/>
               </a:ext>
             </a:extLst>
           </p:cNvPr>
@@ -4585,7 +4585,7 @@
           <p:cNvPr id="6" name="">
             <a:extLst xmlns:a="http://schemas.openxmlformats.org/drawingml/2006/main">
               <a:ext uri="{FF2B5EF4-FFF2-40B4-BE49-F238E27FC236}">
-                <a16:creationId xmlns:a16="http://schemas.microsoft.com/office/drawing/2014/main" id="{061B31B3-5D7F-46D4-8DF9-2FC076531CA1}"/>
+                <a16:creationId xmlns:a16="http://schemas.microsoft.com/office/drawing/2014/main" id="{0FB86554-F694-4AF8-A487-15C53CA1B0DF}"/>
               </a:ext>
             </a:extLst>
           </p:cNvPr>
@@ -4642,7 +4642,7 @@
           <p:cNvPr id="7" name="">
             <a:extLst xmlns:a="http://schemas.openxmlformats.org/drawingml/2006/main">
               <a:ext uri="{FF2B5EF4-FFF2-40B4-BE49-F238E27FC236}">
-                <a16:creationId xmlns:a16="http://schemas.microsoft.com/office/drawing/2014/main" id="{6342835E-A019-4C3A-ABC2-174FE6003E49}"/>
+                <a16:creationId xmlns:a16="http://schemas.microsoft.com/office/drawing/2014/main" id="{22ABF102-A448-45E6-BFEA-8BDBCE336E09}"/>
               </a:ext>
             </a:extLst>
           </p:cNvPr>
@@ -4674,7 +4674,7 @@
           <p:cNvPr id="8" name="">
             <a:extLst xmlns:a="http://schemas.openxmlformats.org/drawingml/2006/main">
               <a:ext uri="{FF2B5EF4-FFF2-40B4-BE49-F238E27FC236}">
-                <a16:creationId xmlns:a16="http://schemas.microsoft.com/office/drawing/2014/main" id="{A9E6137F-3ACA-49F9-A3BB-DB5D58AFC32D}"/>
+                <a16:creationId xmlns:a16="http://schemas.microsoft.com/office/drawing/2014/main" id="{8EA90EA3-EA5D-4446-9D04-F17F63D71768}"/>
               </a:ext>
             </a:extLst>
           </p:cNvPr>
@@ -4731,7 +4731,7 @@
           <p:cNvPr id="9" name="">
             <a:extLst xmlns:a="http://schemas.openxmlformats.org/drawingml/2006/main">
               <a:ext uri="{FF2B5EF4-FFF2-40B4-BE49-F238E27FC236}">
-                <a16:creationId xmlns:a16="http://schemas.microsoft.com/office/drawing/2014/main" id="{2F409A99-0BD7-479A-8579-9088D193C8CA}"/>
+                <a16:creationId xmlns:a16="http://schemas.microsoft.com/office/drawing/2014/main" id="{35014E01-0E1B-43CD-AF12-60C6D4B53A60}"/>
               </a:ext>
             </a:extLst>
           </p:cNvPr>
@@ -4788,7 +4788,7 @@
           <p:cNvPr id="10" name="">
             <a:extLst xmlns:a="http://schemas.openxmlformats.org/drawingml/2006/main">
               <a:ext uri="{FF2B5EF4-FFF2-40B4-BE49-F238E27FC236}">
-                <a16:creationId xmlns:a16="http://schemas.microsoft.com/office/drawing/2014/main" id="{C881D2E0-E114-4D88-8D41-FE4CD3379677}"/>
+                <a16:creationId xmlns:a16="http://schemas.microsoft.com/office/drawing/2014/main" id="{47C544B7-AA6E-4085-97A4-1C8A7DE432DD}"/>
               </a:ext>
             </a:extLst>
           </p:cNvPr>
@@ -4822,7 +4822,7 @@
           <p:cNvPr id="11" name="">
             <a:extLst xmlns:a="http://schemas.openxmlformats.org/drawingml/2006/main">
               <a:ext uri="{FF2B5EF4-FFF2-40B4-BE49-F238E27FC236}">
-                <a16:creationId xmlns:a16="http://schemas.microsoft.com/office/drawing/2014/main" id="{99DA03A8-E0A0-4E65-9582-2D543CF9529B}"/>
+                <a16:creationId xmlns:a16="http://schemas.microsoft.com/office/drawing/2014/main" id="{8B6BBC89-488D-479F-BBC5-FB094856C1DC}"/>
               </a:ext>
             </a:extLst>
           </p:cNvPr>
@@ -4854,7 +4854,7 @@
           <p:cNvPr id="12" name="">
             <a:extLst xmlns:a="http://schemas.openxmlformats.org/drawingml/2006/main">
               <a:ext uri="{FF2B5EF4-FFF2-40B4-BE49-F238E27FC236}">
-                <a16:creationId xmlns:a16="http://schemas.microsoft.com/office/drawing/2014/main" id="{0065941E-CD2B-4731-B5DA-34464B35D80C}"/>
+                <a16:creationId xmlns:a16="http://schemas.microsoft.com/office/drawing/2014/main" id="{CDDF50C2-D91E-4AFE-B157-C7E259B9A7B9}"/>
               </a:ext>
             </a:extLst>
           </p:cNvPr>
@@ -4911,7 +4911,7 @@
           <p:cNvPr id="13" name="">
             <a:extLst xmlns:a="http://schemas.openxmlformats.org/drawingml/2006/main">
               <a:ext uri="{FF2B5EF4-FFF2-40B4-BE49-F238E27FC236}">
-                <a16:creationId xmlns:a16="http://schemas.microsoft.com/office/drawing/2014/main" id="{3D23595F-8720-4DD8-9F04-7884490DD52A}"/>
+                <a16:creationId xmlns:a16="http://schemas.microsoft.com/office/drawing/2014/main" id="{7225F52D-6C9E-49CC-B6DB-9ED101285459}"/>
               </a:ext>
             </a:extLst>
           </p:cNvPr>
@@ -4968,7 +4968,7 @@
           <p:cNvPr id="14" name="">
             <a:extLst xmlns:a="http://schemas.openxmlformats.org/drawingml/2006/main">
               <a:ext uri="{FF2B5EF4-FFF2-40B4-BE49-F238E27FC236}">
-                <a16:creationId xmlns:a16="http://schemas.microsoft.com/office/drawing/2014/main" id="{9C7F78D1-CB37-4D88-96BC-CAB721480581}"/>
+                <a16:creationId xmlns:a16="http://schemas.microsoft.com/office/drawing/2014/main" id="{CDCCF1D0-3E7B-45A9-9603-85B40880A007}"/>
               </a:ext>
             </a:extLst>
           </p:cNvPr>
@@ -5002,7 +5002,7 @@
           <p:cNvPr id="15" name="">
             <a:extLst xmlns:a="http://schemas.openxmlformats.org/drawingml/2006/main">
               <a:ext uri="{FF2B5EF4-FFF2-40B4-BE49-F238E27FC236}">
-                <a16:creationId xmlns:a16="http://schemas.microsoft.com/office/drawing/2014/main" id="{BF16BFDF-BF80-4C8E-899B-52087344F7DE}"/>
+                <a16:creationId xmlns:a16="http://schemas.microsoft.com/office/drawing/2014/main" id="{CCD8134F-0A94-4A2B-B147-54953D17F2EF}"/>
               </a:ext>
             </a:extLst>
           </p:cNvPr>
@@ -5034,7 +5034,7 @@
           <p:cNvPr id="16" name="">
             <a:extLst xmlns:a="http://schemas.openxmlformats.org/drawingml/2006/main">
               <a:ext uri="{FF2B5EF4-FFF2-40B4-BE49-F238E27FC236}">
-                <a16:creationId xmlns:a16="http://schemas.microsoft.com/office/drawing/2014/main" id="{3F17B5BB-69BC-4FBB-88BA-CA289436B0E0}"/>
+                <a16:creationId xmlns:a16="http://schemas.microsoft.com/office/drawing/2014/main" id="{DC12F4D4-A2D4-49C6-881C-ED8890BDCD7E}"/>
               </a:ext>
             </a:extLst>
           </p:cNvPr>
@@ -5091,7 +5091,7 @@
           <p:cNvPr id="17" name="">
             <a:extLst xmlns:a="http://schemas.openxmlformats.org/drawingml/2006/main">
               <a:ext uri="{FF2B5EF4-FFF2-40B4-BE49-F238E27FC236}">
-                <a16:creationId xmlns:a16="http://schemas.microsoft.com/office/drawing/2014/main" id="{EC7E9D99-FB2C-4696-A48A-50BA2716CB2F}"/>
+                <a16:creationId xmlns:a16="http://schemas.microsoft.com/office/drawing/2014/main" id="{D1860866-B244-4AE0-93B1-9D47C1323645}"/>
               </a:ext>
             </a:extLst>
           </p:cNvPr>
@@ -5148,7 +5148,7 @@
           <p:cNvPr id="18" name="">
             <a:extLst xmlns:a="http://schemas.openxmlformats.org/drawingml/2006/main">
               <a:ext uri="{FF2B5EF4-FFF2-40B4-BE49-F238E27FC236}">
-                <a16:creationId xmlns:a16="http://schemas.microsoft.com/office/drawing/2014/main" id="{8C9E8B4C-FB8F-4587-97F2-DA4D1C7F6EEB}"/>
+                <a16:creationId xmlns:a16="http://schemas.microsoft.com/office/drawing/2014/main" id="{5F91D570-9E9E-41E3-875E-CC28A0595B53}"/>
               </a:ext>
             </a:extLst>
           </p:cNvPr>
@@ -5182,7 +5182,7 @@
           <p:cNvPr id="19" name="">
             <a:extLst xmlns:a="http://schemas.openxmlformats.org/drawingml/2006/main">
               <a:ext uri="{FF2B5EF4-FFF2-40B4-BE49-F238E27FC236}">
-                <a16:creationId xmlns:a16="http://schemas.microsoft.com/office/drawing/2014/main" id="{D843AB22-D1D0-44BB-A192-575E18F43509}"/>
+                <a16:creationId xmlns:a16="http://schemas.microsoft.com/office/drawing/2014/main" id="{311E2BE3-29F6-4DE5-BBA6-F01CD1FD06F6}"/>
               </a:ext>
             </a:extLst>
           </p:cNvPr>
@@ -5214,7 +5214,7 @@
           <p:cNvPr id="20" name="">
             <a:extLst xmlns:a="http://schemas.openxmlformats.org/drawingml/2006/main">
               <a:ext uri="{FF2B5EF4-FFF2-40B4-BE49-F238E27FC236}">
-                <a16:creationId xmlns:a16="http://schemas.microsoft.com/office/drawing/2014/main" id="{99AF263B-16CF-4AA3-B427-C68012E62572}"/>
+                <a16:creationId xmlns:a16="http://schemas.microsoft.com/office/drawing/2014/main" id="{462E3D72-BE18-4A2D-BACA-D274E910AC8F}"/>
               </a:ext>
             </a:extLst>
           </p:cNvPr>
@@ -5271,7 +5271,7 @@
           <p:cNvPr id="21" name="">
             <a:extLst xmlns:a="http://schemas.openxmlformats.org/drawingml/2006/main">
               <a:ext uri="{FF2B5EF4-FFF2-40B4-BE49-F238E27FC236}">
-                <a16:creationId xmlns:a16="http://schemas.microsoft.com/office/drawing/2014/main" id="{F19CC929-FB6A-4796-A11F-14EEF25782B4}"/>
+                <a16:creationId xmlns:a16="http://schemas.microsoft.com/office/drawing/2014/main" id="{1ABD0A7D-F465-4ADC-A0A6-64D699EE29E9}"/>
               </a:ext>
             </a:extLst>
           </p:cNvPr>
@@ -5328,7 +5328,7 @@
           <p:cNvPr id="22" name="">
             <a:extLst xmlns:a="http://schemas.openxmlformats.org/drawingml/2006/main">
               <a:ext uri="{FF2B5EF4-FFF2-40B4-BE49-F238E27FC236}">
-                <a16:creationId xmlns:a16="http://schemas.microsoft.com/office/drawing/2014/main" id="{5A20F371-0672-4309-B23D-B8FA16C7BCB7}"/>
+                <a16:creationId xmlns:a16="http://schemas.microsoft.com/office/drawing/2014/main" id="{33DAF775-7F12-44B4-ADBB-C52709453123}"/>
               </a:ext>
             </a:extLst>
           </p:cNvPr>
@@ -5383,7 +5383,7 @@
     </p:spTree>
     <p:extLst>
       <p:ext uri="{BB962C8B-B14F-4D97-AF65-F5344CB8AC3E}">
-        <p14:creationId xmlns:p14="http://schemas.microsoft.com/office/powerpoint/2010/main" val="85284230"/>
+        <p14:creationId xmlns:p14="http://schemas.microsoft.com/office/powerpoint/2010/main" val="778558430"/>
       </p:ext>
     </p:extLst>
   </p:cSld>
@@ -5584,7 +5584,7 @@
           <p:cNvPr id="23" name="">
             <a:extLst xmlns:a="http://schemas.openxmlformats.org/drawingml/2006/main">
               <a:ext uri="{FF2B5EF4-FFF2-40B4-BE49-F238E27FC236}">
-                <a16:creationId xmlns:a16="http://schemas.microsoft.com/office/drawing/2014/main" id="{0C9CCB31-99D0-4A9F-B7AA-458AB870E056}"/>
+                <a16:creationId xmlns:a16="http://schemas.microsoft.com/office/drawing/2014/main" id="{74DEFEBD-F581-4385-8380-7DFE72864B1B}"/>
               </a:ext>
             </a:extLst>
           </p:cNvPr>
@@ -5616,7 +5616,7 @@
           <p:cNvPr id="2" name="">
             <a:extLst xmlns:a="http://schemas.openxmlformats.org/drawingml/2006/main">
               <a:ext uri="{FF2B5EF4-FFF2-40B4-BE49-F238E27FC236}">
-                <a16:creationId xmlns:a16="http://schemas.microsoft.com/office/drawing/2014/main" id="{057F60CE-086D-417B-9133-3755846287FC}"/>
+                <a16:creationId xmlns:a16="http://schemas.microsoft.com/office/drawing/2014/main" id="{84FF5A74-1719-4097-8611-246BF0E11CE5}"/>
               </a:ext>
             </a:extLst>
           </p:cNvPr>
@@ -5673,7 +5673,7 @@
           <p:cNvPr id="3" name="">
             <a:extLst xmlns:a="http://schemas.openxmlformats.org/drawingml/2006/main">
               <a:ext uri="{FF2B5EF4-FFF2-40B4-BE49-F238E27FC236}">
-                <a16:creationId xmlns:a16="http://schemas.microsoft.com/office/drawing/2014/main" id="{AFEA9313-0031-46DD-8FB5-A5273AD91524}"/>
+                <a16:creationId xmlns:a16="http://schemas.microsoft.com/office/drawing/2014/main" id="{3233660C-E6F3-4799-893A-357B681EE1E3}"/>
               </a:ext>
             </a:extLst>
           </p:cNvPr>
@@ -5705,7 +5705,7 @@
           <p:cNvPr id="4" name="">
             <a:extLst xmlns:a="http://schemas.openxmlformats.org/drawingml/2006/main">
               <a:ext uri="{FF2B5EF4-FFF2-40B4-BE49-F238E27FC236}">
-                <a16:creationId xmlns:a16="http://schemas.microsoft.com/office/drawing/2014/main" id="{88E95713-D7FA-42BE-BA04-72301159BA5D}"/>
+                <a16:creationId xmlns:a16="http://schemas.microsoft.com/office/drawing/2014/main" id="{94C066DE-1022-4859-BCCB-0FF494BFEE6C}"/>
               </a:ext>
             </a:extLst>
           </p:cNvPr>
@@ -5762,7 +5762,7 @@
           <p:cNvPr id="5" name="">
             <a:extLst xmlns:a="http://schemas.openxmlformats.org/drawingml/2006/main">
               <a:ext uri="{FF2B5EF4-FFF2-40B4-BE49-F238E27FC236}">
-                <a16:creationId xmlns:a16="http://schemas.microsoft.com/office/drawing/2014/main" id="{0CBBD8DB-A69D-4327-877A-BC83FF9AE4CA}"/>
+                <a16:creationId xmlns:a16="http://schemas.microsoft.com/office/drawing/2014/main" id="{3B5596AF-ADDF-4366-BF92-F218F9E02E6F}"/>
               </a:ext>
             </a:extLst>
           </p:cNvPr>
@@ -5819,7 +5819,7 @@
           <p:cNvPr id="6" name="">
             <a:extLst xmlns:a="http://schemas.openxmlformats.org/drawingml/2006/main">
               <a:ext uri="{FF2B5EF4-FFF2-40B4-BE49-F238E27FC236}">
-                <a16:creationId xmlns:a16="http://schemas.microsoft.com/office/drawing/2014/main" id="{FC8D6095-6F2F-4871-BF50-C201CE3477E2}"/>
+                <a16:creationId xmlns:a16="http://schemas.microsoft.com/office/drawing/2014/main" id="{EDBD8F92-82F2-4A54-9B9B-312F401465DC}"/>
               </a:ext>
             </a:extLst>
           </p:cNvPr>
@@ -5876,7 +5876,7 @@
           <p:cNvPr id="7" name="">
             <a:extLst xmlns:a="http://schemas.openxmlformats.org/drawingml/2006/main">
               <a:ext uri="{FF2B5EF4-FFF2-40B4-BE49-F238E27FC236}">
-                <a16:creationId xmlns:a16="http://schemas.microsoft.com/office/drawing/2014/main" id="{74D1968E-FD9C-4CEF-89FC-8D22E8B90409}"/>
+                <a16:creationId xmlns:a16="http://schemas.microsoft.com/office/drawing/2014/main" id="{858E387B-10B6-4246-ADE5-74B9D1E50103}"/>
               </a:ext>
             </a:extLst>
           </p:cNvPr>
@@ -5908,7 +5908,7 @@
           <p:cNvPr id="8" name="">
             <a:extLst xmlns:a="http://schemas.openxmlformats.org/drawingml/2006/main">
               <a:ext uri="{FF2B5EF4-FFF2-40B4-BE49-F238E27FC236}">
-                <a16:creationId xmlns:a16="http://schemas.microsoft.com/office/drawing/2014/main" id="{A547D5F0-90D7-4479-930B-D0E34A3D7A7B}"/>
+                <a16:creationId xmlns:a16="http://schemas.microsoft.com/office/drawing/2014/main" id="{C9F48554-0820-42B3-AB9F-45749E12B078}"/>
               </a:ext>
             </a:extLst>
           </p:cNvPr>
@@ -5965,7 +5965,7 @@
           <p:cNvPr id="9" name="">
             <a:extLst xmlns:a="http://schemas.openxmlformats.org/drawingml/2006/main">
               <a:ext uri="{FF2B5EF4-FFF2-40B4-BE49-F238E27FC236}">
-                <a16:creationId xmlns:a16="http://schemas.microsoft.com/office/drawing/2014/main" id="{AD12425F-FCC6-4709-A3E0-3B89AACFF70D}"/>
+                <a16:creationId xmlns:a16="http://schemas.microsoft.com/office/drawing/2014/main" id="{BD7F3141-6A6C-4E4F-A8E8-A7251E1A1962}"/>
               </a:ext>
             </a:extLst>
           </p:cNvPr>
@@ -6022,7 +6022,7 @@
           <p:cNvPr id="10" name="">
             <a:extLst xmlns:a="http://schemas.openxmlformats.org/drawingml/2006/main">
               <a:ext uri="{FF2B5EF4-FFF2-40B4-BE49-F238E27FC236}">
-                <a16:creationId xmlns:a16="http://schemas.microsoft.com/office/drawing/2014/main" id="{94F22C7A-7E83-4E76-9B71-91E0106CDA3B}"/>
+                <a16:creationId xmlns:a16="http://schemas.microsoft.com/office/drawing/2014/main" id="{0D75AE84-6589-45D8-BDF3-FAA4DC2EA8B0}"/>
               </a:ext>
             </a:extLst>
           </p:cNvPr>
@@ -6056,7 +6056,7 @@
           <p:cNvPr id="11" name="">
             <a:extLst xmlns:a="http://schemas.openxmlformats.org/drawingml/2006/main">
               <a:ext uri="{FF2B5EF4-FFF2-40B4-BE49-F238E27FC236}">
-                <a16:creationId xmlns:a16="http://schemas.microsoft.com/office/drawing/2014/main" id="{E78A15C8-E465-40DA-8905-F5566EE2D2EC}"/>
+                <a16:creationId xmlns:a16="http://schemas.microsoft.com/office/drawing/2014/main" id="{47164B9C-3E9B-4385-8C9B-544EDB35C227}"/>
               </a:ext>
             </a:extLst>
           </p:cNvPr>
@@ -6088,7 +6088,7 @@
           <p:cNvPr id="12" name="">
             <a:extLst xmlns:a="http://schemas.openxmlformats.org/drawingml/2006/main">
               <a:ext uri="{FF2B5EF4-FFF2-40B4-BE49-F238E27FC236}">
-                <a16:creationId xmlns:a16="http://schemas.microsoft.com/office/drawing/2014/main" id="{596B7695-CBBA-4944-8B4A-DD60B53F6E66}"/>
+                <a16:creationId xmlns:a16="http://schemas.microsoft.com/office/drawing/2014/main" id="{1445669C-FC15-4AC4-B477-F9E58358ED42}"/>
               </a:ext>
             </a:extLst>
           </p:cNvPr>
@@ -6145,7 +6145,7 @@
           <p:cNvPr id="13" name="">
             <a:extLst xmlns:a="http://schemas.openxmlformats.org/drawingml/2006/main">
               <a:ext uri="{FF2B5EF4-FFF2-40B4-BE49-F238E27FC236}">
-                <a16:creationId xmlns:a16="http://schemas.microsoft.com/office/drawing/2014/main" id="{8BB225A5-6DBF-4336-931D-D0B926E0DB79}"/>
+                <a16:creationId xmlns:a16="http://schemas.microsoft.com/office/drawing/2014/main" id="{EC4E3BA6-15F0-47DB-8E80-3FF4EAC2AC09}"/>
               </a:ext>
             </a:extLst>
           </p:cNvPr>
@@ -6202,7 +6202,7 @@
           <p:cNvPr id="14" name="">
             <a:extLst xmlns:a="http://schemas.openxmlformats.org/drawingml/2006/main">
               <a:ext uri="{FF2B5EF4-FFF2-40B4-BE49-F238E27FC236}">
-                <a16:creationId xmlns:a16="http://schemas.microsoft.com/office/drawing/2014/main" id="{EE7B2E17-6C60-4134-8EC2-4E52505B6B84}"/>
+                <a16:creationId xmlns:a16="http://schemas.microsoft.com/office/drawing/2014/main" id="{687C9560-C1F5-490E-9B7B-70284E64D855}"/>
               </a:ext>
             </a:extLst>
           </p:cNvPr>
@@ -6236,7 +6236,7 @@
           <p:cNvPr id="15" name="">
             <a:extLst xmlns:a="http://schemas.openxmlformats.org/drawingml/2006/main">
               <a:ext uri="{FF2B5EF4-FFF2-40B4-BE49-F238E27FC236}">
-                <a16:creationId xmlns:a16="http://schemas.microsoft.com/office/drawing/2014/main" id="{A54DA341-2A2E-43DC-A100-13896D677996}"/>
+                <a16:creationId xmlns:a16="http://schemas.microsoft.com/office/drawing/2014/main" id="{41ECF7B0-7039-4DBF-A3F2-17799C9DC13B}"/>
               </a:ext>
             </a:extLst>
           </p:cNvPr>
@@ -6268,7 +6268,7 @@
           <p:cNvPr id="16" name="">
             <a:extLst xmlns:a="http://schemas.openxmlformats.org/drawingml/2006/main">
               <a:ext uri="{FF2B5EF4-FFF2-40B4-BE49-F238E27FC236}">
-                <a16:creationId xmlns:a16="http://schemas.microsoft.com/office/drawing/2014/main" id="{39233F62-4FA4-46C1-9D05-E227ADC1228E}"/>
+                <a16:creationId xmlns:a16="http://schemas.microsoft.com/office/drawing/2014/main" id="{DA266DA5-EFAE-49C5-B3CA-43D12CB8EEC6}"/>
               </a:ext>
             </a:extLst>
           </p:cNvPr>
@@ -6325,7 +6325,7 @@
           <p:cNvPr id="17" name="">
             <a:extLst xmlns:a="http://schemas.openxmlformats.org/drawingml/2006/main">
               <a:ext uri="{FF2B5EF4-FFF2-40B4-BE49-F238E27FC236}">
-                <a16:creationId xmlns:a16="http://schemas.microsoft.com/office/drawing/2014/main" id="{72608B38-6F8A-4153-8481-14F932B272C0}"/>
+                <a16:creationId xmlns:a16="http://schemas.microsoft.com/office/drawing/2014/main" id="{62C35400-3305-4E26-8F89-0DF41C916357}"/>
               </a:ext>
             </a:extLst>
           </p:cNvPr>
@@ -6382,7 +6382,7 @@
           <p:cNvPr id="18" name="">
             <a:extLst xmlns:a="http://schemas.openxmlformats.org/drawingml/2006/main">
               <a:ext uri="{FF2B5EF4-FFF2-40B4-BE49-F238E27FC236}">
-                <a16:creationId xmlns:a16="http://schemas.microsoft.com/office/drawing/2014/main" id="{10E63924-1FE8-4DCB-89B8-3224B0E21B4B}"/>
+                <a16:creationId xmlns:a16="http://schemas.microsoft.com/office/drawing/2014/main" id="{16A8B6F7-C3B2-4D96-904D-9355EC7AC89A}"/>
               </a:ext>
             </a:extLst>
           </p:cNvPr>
@@ -6416,7 +6416,7 @@
           <p:cNvPr id="19" name="">
             <a:extLst xmlns:a="http://schemas.openxmlformats.org/drawingml/2006/main">
               <a:ext uri="{FF2B5EF4-FFF2-40B4-BE49-F238E27FC236}">
-                <a16:creationId xmlns:a16="http://schemas.microsoft.com/office/drawing/2014/main" id="{40DE9BB5-BB10-4FB2-9757-4811C5A5FA44}"/>
+                <a16:creationId xmlns:a16="http://schemas.microsoft.com/office/drawing/2014/main" id="{B1FF3D0C-E6D5-4FA8-BB98-F89A5D2FDF8F}"/>
               </a:ext>
             </a:extLst>
           </p:cNvPr>
@@ -6448,7 +6448,7 @@
           <p:cNvPr id="20" name="">
             <a:extLst xmlns:a="http://schemas.openxmlformats.org/drawingml/2006/main">
               <a:ext uri="{FF2B5EF4-FFF2-40B4-BE49-F238E27FC236}">
-                <a16:creationId xmlns:a16="http://schemas.microsoft.com/office/drawing/2014/main" id="{C7B5A1B6-B6B8-48F1-9426-AC40FC85AC43}"/>
+                <a16:creationId xmlns:a16="http://schemas.microsoft.com/office/drawing/2014/main" id="{097D34A5-AD0B-4B59-8198-B53A6826C9AD}"/>
               </a:ext>
             </a:extLst>
           </p:cNvPr>
@@ -6505,7 +6505,7 @@
           <p:cNvPr id="21" name="">
             <a:extLst xmlns:a="http://schemas.openxmlformats.org/drawingml/2006/main">
               <a:ext uri="{FF2B5EF4-FFF2-40B4-BE49-F238E27FC236}">
-                <a16:creationId xmlns:a16="http://schemas.microsoft.com/office/drawing/2014/main" id="{CC98F3FF-81D2-48F9-95A0-80F7471709B6}"/>
+                <a16:creationId xmlns:a16="http://schemas.microsoft.com/office/drawing/2014/main" id="{C1E741C6-E6D8-40CC-A8F0-337209C6FBE8}"/>
               </a:ext>
             </a:extLst>
           </p:cNvPr>
@@ -6562,7 +6562,7 @@
           <p:cNvPr id="22" name="">
             <a:extLst xmlns:a="http://schemas.openxmlformats.org/drawingml/2006/main">
               <a:ext uri="{FF2B5EF4-FFF2-40B4-BE49-F238E27FC236}">
-                <a16:creationId xmlns:a16="http://schemas.microsoft.com/office/drawing/2014/main" id="{003ACB4E-51D0-4055-8206-A6B430A8A837}"/>
+                <a16:creationId xmlns:a16="http://schemas.microsoft.com/office/drawing/2014/main" id="{9FE09CB9-EB03-47A6-B815-C97D7F47E499}"/>
               </a:ext>
             </a:extLst>
           </p:cNvPr>
@@ -6617,7 +6617,7 @@
     </p:spTree>
     <p:extLst>
       <p:ext uri="{BB962C8B-B14F-4D97-AF65-F5344CB8AC3E}">
-        <p14:creationId xmlns:p14="http://schemas.microsoft.com/office/powerpoint/2010/main" val="200403917"/>
+        <p14:creationId xmlns:p14="http://schemas.microsoft.com/office/powerpoint/2010/main" val="6738077"/>
       </p:ext>
     </p:extLst>
   </p:cSld>
@@ -6818,7 +6818,7 @@
           <p:cNvPr id="16" name="">
             <a:extLst xmlns:a="http://schemas.openxmlformats.org/drawingml/2006/main">
               <a:ext uri="{FF2B5EF4-FFF2-40B4-BE49-F238E27FC236}">
-                <a16:creationId xmlns:a16="http://schemas.microsoft.com/office/drawing/2014/main" id="{5B426200-7523-4A96-982F-8B64C349D5BC}"/>
+                <a16:creationId xmlns:a16="http://schemas.microsoft.com/office/drawing/2014/main" id="{76F4B020-30C8-422E-BF39-4AC50BD1F6E5}"/>
               </a:ext>
             </a:extLst>
           </p:cNvPr>
@@ -6850,7 +6850,7 @@
           <p:cNvPr id="2" name="">
             <a:extLst xmlns:a="http://schemas.openxmlformats.org/drawingml/2006/main">
               <a:ext uri="{FF2B5EF4-FFF2-40B4-BE49-F238E27FC236}">
-                <a16:creationId xmlns:a16="http://schemas.microsoft.com/office/drawing/2014/main" id="{6F083C64-1F2A-40AF-B0ED-AF5F9BE3832D}"/>
+                <a16:creationId xmlns:a16="http://schemas.microsoft.com/office/drawing/2014/main" id="{5BDFC387-379C-425A-B4EA-91C4B407A06E}"/>
               </a:ext>
             </a:extLst>
           </p:cNvPr>
@@ -6907,7 +6907,7 @@
           <p:cNvPr id="3" name="">
             <a:extLst xmlns:a="http://schemas.openxmlformats.org/drawingml/2006/main">
               <a:ext uri="{FF2B5EF4-FFF2-40B4-BE49-F238E27FC236}">
-                <a16:creationId xmlns:a16="http://schemas.microsoft.com/office/drawing/2014/main" id="{4D1A5C64-B997-4CD2-8923-DD3F67450372}"/>
+                <a16:creationId xmlns:a16="http://schemas.microsoft.com/office/drawing/2014/main" id="{F8C6F145-0596-406C-8EFE-DE8D607F3351}"/>
               </a:ext>
             </a:extLst>
           </p:cNvPr>
@@ -6939,7 +6939,7 @@
           <p:cNvPr id="4" name="">
             <a:extLst xmlns:a="http://schemas.openxmlformats.org/drawingml/2006/main">
               <a:ext uri="{FF2B5EF4-FFF2-40B4-BE49-F238E27FC236}">
-                <a16:creationId xmlns:a16="http://schemas.microsoft.com/office/drawing/2014/main" id="{9BDD1BDD-5D78-46B1-806B-424B54B3F8C0}"/>
+                <a16:creationId xmlns:a16="http://schemas.microsoft.com/office/drawing/2014/main" id="{E5B232AB-55C0-4F19-A945-68CA75BBAB80}"/>
               </a:ext>
             </a:extLst>
           </p:cNvPr>
@@ -6996,7 +6996,7 @@
           <p:cNvPr id="5" name="">
             <a:extLst xmlns:a="http://schemas.openxmlformats.org/drawingml/2006/main">
               <a:ext uri="{FF2B5EF4-FFF2-40B4-BE49-F238E27FC236}">
-                <a16:creationId xmlns:a16="http://schemas.microsoft.com/office/drawing/2014/main" id="{C152F3B3-F40B-440F-BCA3-0A4AC002D17A}"/>
+                <a16:creationId xmlns:a16="http://schemas.microsoft.com/office/drawing/2014/main" id="{717199C9-1F61-4942-B854-C4E6F665471F}"/>
               </a:ext>
             </a:extLst>
           </p:cNvPr>
@@ -7053,7 +7053,7 @@
           <p:cNvPr id="6" name="">
             <a:extLst xmlns:a="http://schemas.openxmlformats.org/drawingml/2006/main">
               <a:ext uri="{FF2B5EF4-FFF2-40B4-BE49-F238E27FC236}">
-                <a16:creationId xmlns:a16="http://schemas.microsoft.com/office/drawing/2014/main" id="{AF1BDB56-4242-47EC-9FC6-D5D5EE2AA346}"/>
+                <a16:creationId xmlns:a16="http://schemas.microsoft.com/office/drawing/2014/main" id="{CBB508D7-D305-41FE-AAD2-0F805C919D66}"/>
               </a:ext>
             </a:extLst>
           </p:cNvPr>
@@ -7110,7 +7110,7 @@
           <p:cNvPr id="7" name="">
             <a:extLst xmlns:a="http://schemas.openxmlformats.org/drawingml/2006/main">
               <a:ext uri="{FF2B5EF4-FFF2-40B4-BE49-F238E27FC236}">
-                <a16:creationId xmlns:a16="http://schemas.microsoft.com/office/drawing/2014/main" id="{2EE7ED14-B292-4B53-A03C-B4CA5DE8E99D}"/>
+                <a16:creationId xmlns:a16="http://schemas.microsoft.com/office/drawing/2014/main" id="{21AE946F-763B-496C-BFE7-F153B01FCDD8}"/>
               </a:ext>
             </a:extLst>
           </p:cNvPr>
@@ -7142,7 +7142,7 @@
           <p:cNvPr id="8" name="">
             <a:extLst xmlns:a="http://schemas.openxmlformats.org/drawingml/2006/main">
               <a:ext uri="{FF2B5EF4-FFF2-40B4-BE49-F238E27FC236}">
-                <a16:creationId xmlns:a16="http://schemas.microsoft.com/office/drawing/2014/main" id="{80D23FDC-0093-4B99-AA0E-95B34EF92F0F}"/>
+                <a16:creationId xmlns:a16="http://schemas.microsoft.com/office/drawing/2014/main" id="{BF619BF6-B099-46AE-9872-EB79833004C9}"/>
               </a:ext>
             </a:extLst>
           </p:cNvPr>
@@ -7199,7 +7199,7 @@
           <p:cNvPr id="9" name="">
             <a:extLst xmlns:a="http://schemas.openxmlformats.org/drawingml/2006/main">
               <a:ext uri="{FF2B5EF4-FFF2-40B4-BE49-F238E27FC236}">
-                <a16:creationId xmlns:a16="http://schemas.microsoft.com/office/drawing/2014/main" id="{774914BA-8CAE-4C41-B4E8-63AA9C668D2D}"/>
+                <a16:creationId xmlns:a16="http://schemas.microsoft.com/office/drawing/2014/main" id="{89001747-35F5-4842-BDC6-A00878D7E959}"/>
               </a:ext>
             </a:extLst>
           </p:cNvPr>
@@ -7256,7 +7256,7 @@
           <p:cNvPr id="10" name="">
             <a:extLst xmlns:a="http://schemas.openxmlformats.org/drawingml/2006/main">
               <a:ext uri="{FF2B5EF4-FFF2-40B4-BE49-F238E27FC236}">
-                <a16:creationId xmlns:a16="http://schemas.microsoft.com/office/drawing/2014/main" id="{8329618D-B376-4386-94B9-0C97A01378EB}"/>
+                <a16:creationId xmlns:a16="http://schemas.microsoft.com/office/drawing/2014/main" id="{7E4751BE-7E64-4517-ADEA-8D9030FC6002}"/>
               </a:ext>
             </a:extLst>
           </p:cNvPr>
@@ -7313,7 +7313,7 @@
           <p:cNvPr id="11" name="">
             <a:extLst xmlns:a="http://schemas.openxmlformats.org/drawingml/2006/main">
               <a:ext uri="{FF2B5EF4-FFF2-40B4-BE49-F238E27FC236}">
-                <a16:creationId xmlns:a16="http://schemas.microsoft.com/office/drawing/2014/main" id="{5C162326-D2CD-45B4-BA34-95A19849BCBE}"/>
+                <a16:creationId xmlns:a16="http://schemas.microsoft.com/office/drawing/2014/main" id="{8032B66F-1EDF-4520-85E4-4F587282FCFE}"/>
               </a:ext>
             </a:extLst>
           </p:cNvPr>
@@ -7345,7 +7345,7 @@
           <p:cNvPr id="12" name="">
             <a:extLst xmlns:a="http://schemas.openxmlformats.org/drawingml/2006/main">
               <a:ext uri="{FF2B5EF4-FFF2-40B4-BE49-F238E27FC236}">
-                <a16:creationId xmlns:a16="http://schemas.microsoft.com/office/drawing/2014/main" id="{5F2FF80D-9B43-4C40-B59A-990F9FE48CB0}"/>
+                <a16:creationId xmlns:a16="http://schemas.microsoft.com/office/drawing/2014/main" id="{B6FD7CDD-6868-43CF-AD32-BFBACCACB2F5}"/>
               </a:ext>
             </a:extLst>
           </p:cNvPr>
@@ -7402,7 +7402,7 @@
           <p:cNvPr id="13" name="">
             <a:extLst xmlns:a="http://schemas.openxmlformats.org/drawingml/2006/main">
               <a:ext uri="{FF2B5EF4-FFF2-40B4-BE49-F238E27FC236}">
-                <a16:creationId xmlns:a16="http://schemas.microsoft.com/office/drawing/2014/main" id="{68779334-4231-4A03-901C-DD0A276DD326}"/>
+                <a16:creationId xmlns:a16="http://schemas.microsoft.com/office/drawing/2014/main" id="{4767D00F-A2CE-47AC-821F-B69A9E0BC561}"/>
               </a:ext>
             </a:extLst>
           </p:cNvPr>
@@ -7459,7 +7459,7 @@
           <p:cNvPr id="14" name="">
             <a:extLst xmlns:a="http://schemas.openxmlformats.org/drawingml/2006/main">
               <a:ext uri="{FF2B5EF4-FFF2-40B4-BE49-F238E27FC236}">
-                <a16:creationId xmlns:a16="http://schemas.microsoft.com/office/drawing/2014/main" id="{05640D3E-5E8C-4155-A313-A7ACE9F5CE70}"/>
+                <a16:creationId xmlns:a16="http://schemas.microsoft.com/office/drawing/2014/main" id="{7AA8D9D5-ADC3-4A31-8271-544651B9BBA2}"/>
               </a:ext>
             </a:extLst>
           </p:cNvPr>
@@ -7516,7 +7516,7 @@
           <p:cNvPr id="15" name="">
             <a:extLst xmlns:a="http://schemas.openxmlformats.org/drawingml/2006/main">
               <a:ext uri="{FF2B5EF4-FFF2-40B4-BE49-F238E27FC236}">
-                <a16:creationId xmlns:a16="http://schemas.microsoft.com/office/drawing/2014/main" id="{998330AC-6C29-4D51-AE62-84D4375BCEF2}"/>
+                <a16:creationId xmlns:a16="http://schemas.microsoft.com/office/drawing/2014/main" id="{739BE5B8-A7D5-4369-9840-B3B1788820D3}"/>
               </a:ext>
             </a:extLst>
           </p:cNvPr>
@@ -7571,7 +7571,7 @@
     </p:spTree>
     <p:extLst>
       <p:ext uri="{BB962C8B-B14F-4D97-AF65-F5344CB8AC3E}">
-        <p14:creationId xmlns:p14="http://schemas.microsoft.com/office/powerpoint/2010/main" val="1190563851"/>
+        <p14:creationId xmlns:p14="http://schemas.microsoft.com/office/powerpoint/2010/main" val="507489000"/>
       </p:ext>
     </p:extLst>
   </p:cSld>
@@ -7769,10 +7769,10 @@
       </p:grpSpPr>
       <p:sp>
         <p:nvSpPr>
-          <p:cNvPr id="23" name="">
-            <a:extLst xmlns:a="http://schemas.openxmlformats.org/drawingml/2006/main">
-              <a:ext uri="{FF2B5EF4-FFF2-40B4-BE49-F238E27FC236}">
-                <a16:creationId xmlns:a16="http://schemas.microsoft.com/office/drawing/2014/main" id="{A9804117-347C-48F8-82B3-CB2248A5A222}"/>
+          <p:cNvPr id="26" name="">
+            <a:extLst xmlns:a="http://schemas.openxmlformats.org/drawingml/2006/main">
+              <a:ext uri="{FF2B5EF4-FFF2-40B4-BE49-F238E27FC236}">
+                <a16:creationId xmlns:a16="http://schemas.microsoft.com/office/drawing/2014/main" id="{28A4DD6B-1642-4A15-BA7A-392FF9219B69}"/>
               </a:ext>
             </a:extLst>
           </p:cNvPr>
@@ -7804,7 +7804,7 @@
           <p:cNvPr id="2" name="">
             <a:extLst xmlns:a="http://schemas.openxmlformats.org/drawingml/2006/main">
               <a:ext uri="{FF2B5EF4-FFF2-40B4-BE49-F238E27FC236}">
-                <a16:creationId xmlns:a16="http://schemas.microsoft.com/office/drawing/2014/main" id="{F6E7B82F-21F1-4ADD-8C26-F61E95CA0631}"/>
+                <a16:creationId xmlns:a16="http://schemas.microsoft.com/office/drawing/2014/main" id="{6811F12B-1054-4504-90BA-157961ED3DB3}"/>
               </a:ext>
             </a:extLst>
           </p:cNvPr>
@@ -7861,7 +7861,7 @@
           <p:cNvPr id="3" name="">
             <a:extLst xmlns:a="http://schemas.openxmlformats.org/drawingml/2006/main">
               <a:ext uri="{FF2B5EF4-FFF2-40B4-BE49-F238E27FC236}">
-                <a16:creationId xmlns:a16="http://schemas.microsoft.com/office/drawing/2014/main" id="{75497FAA-E786-4ED8-B46E-53E3AB9BF96E}"/>
+                <a16:creationId xmlns:a16="http://schemas.microsoft.com/office/drawing/2014/main" id="{98D0AA81-9F38-42E7-8D7D-3DF33C1FBE6C}"/>
               </a:ext>
             </a:extLst>
           </p:cNvPr>
@@ -7893,7 +7893,7 @@
           <p:cNvPr id="4" name="">
             <a:extLst xmlns:a="http://schemas.openxmlformats.org/drawingml/2006/main">
               <a:ext uri="{FF2B5EF4-FFF2-40B4-BE49-F238E27FC236}">
-                <a16:creationId xmlns:a16="http://schemas.microsoft.com/office/drawing/2014/main" id="{93B7062B-BB05-4CBB-AB62-57C6474AA1D4}"/>
+                <a16:creationId xmlns:a16="http://schemas.microsoft.com/office/drawing/2014/main" id="{3F17DEDB-0150-4AA0-838C-90961705632A}"/>
               </a:ext>
             </a:extLst>
           </p:cNvPr>
@@ -7950,7 +7950,7 @@
           <p:cNvPr id="5" name="">
             <a:extLst xmlns:a="http://schemas.openxmlformats.org/drawingml/2006/main">
               <a:ext uri="{FF2B5EF4-FFF2-40B4-BE49-F238E27FC236}">
-                <a16:creationId xmlns:a16="http://schemas.microsoft.com/office/drawing/2014/main" id="{7F1E2155-A296-474A-A575-84591D81E89E}"/>
+                <a16:creationId xmlns:a16="http://schemas.microsoft.com/office/drawing/2014/main" id="{567CA62C-9867-4C28-950B-C4B9B98267AF}"/>
               </a:ext>
             </a:extLst>
           </p:cNvPr>
@@ -8007,7 +8007,7 @@
           <p:cNvPr id="6" name="">
             <a:extLst xmlns:a="http://schemas.openxmlformats.org/drawingml/2006/main">
               <a:ext uri="{FF2B5EF4-FFF2-40B4-BE49-F238E27FC236}">
-                <a16:creationId xmlns:a16="http://schemas.microsoft.com/office/drawing/2014/main" id="{D636E095-96F1-41E9-9B04-11C35697F032}"/>
+                <a16:creationId xmlns:a16="http://schemas.microsoft.com/office/drawing/2014/main" id="{2C902E93-F75D-48C8-B9BB-79A46A4175B0}"/>
               </a:ext>
             </a:extLst>
           </p:cNvPr>
@@ -8064,7 +8064,7 @@
           <p:cNvPr id="7" name="">
             <a:extLst xmlns:a="http://schemas.openxmlformats.org/drawingml/2006/main">
               <a:ext uri="{FF2B5EF4-FFF2-40B4-BE49-F238E27FC236}">
-                <a16:creationId xmlns:a16="http://schemas.microsoft.com/office/drawing/2014/main" id="{82320610-8354-4752-A442-F96A593491C0}"/>
+                <a16:creationId xmlns:a16="http://schemas.microsoft.com/office/drawing/2014/main" id="{82879658-CD75-47E0-9050-68E1FBE1FDFC}"/>
               </a:ext>
             </a:extLst>
           </p:cNvPr>
@@ -8096,7 +8096,7 @@
           <p:cNvPr id="8" name="">
             <a:extLst xmlns:a="http://schemas.openxmlformats.org/drawingml/2006/main">
               <a:ext uri="{FF2B5EF4-FFF2-40B4-BE49-F238E27FC236}">
-                <a16:creationId xmlns:a16="http://schemas.microsoft.com/office/drawing/2014/main" id="{1CCD4C5B-1F95-4430-91BE-9753BDF6EE50}"/>
+                <a16:creationId xmlns:a16="http://schemas.microsoft.com/office/drawing/2014/main" id="{14AEC54C-C0BB-498A-85F4-09B1A5902DB5}"/>
               </a:ext>
             </a:extLst>
           </p:cNvPr>
@@ -8153,7 +8153,7 @@
           <p:cNvPr id="9" name="">
             <a:extLst xmlns:a="http://schemas.openxmlformats.org/drawingml/2006/main">
               <a:ext uri="{FF2B5EF4-FFF2-40B4-BE49-F238E27FC236}">
-                <a16:creationId xmlns:a16="http://schemas.microsoft.com/office/drawing/2014/main" id="{63A25453-2C29-444D-944C-590A1BD20203}"/>
+                <a16:creationId xmlns:a16="http://schemas.microsoft.com/office/drawing/2014/main" id="{EBC6A30A-7679-486F-948A-AB6BEB45C10B}"/>
               </a:ext>
             </a:extLst>
           </p:cNvPr>
@@ -8210,19 +8210,19 @@
           <p:cNvPr id="10" name="">
             <a:extLst xmlns:a="http://schemas.openxmlformats.org/drawingml/2006/main">
               <a:ext uri="{FF2B5EF4-FFF2-40B4-BE49-F238E27FC236}">
-                <a16:creationId xmlns:a16="http://schemas.microsoft.com/office/drawing/2014/main" id="{338222B8-4C6A-4BC6-91C3-08EAC6968514}"/>
-              </a:ext>
-            </a:extLst>
-          </p:cNvPr>
-          <p:cNvSpPr>
-            <a:spLocks xmlns:a="http://schemas.openxmlformats.org/drawingml/2006/main" noGrp="1"/>
-          </p:cNvSpPr>
-          <p:nvPr/>
-        </p:nvSpPr>
-        <p:spPr>
-          <a:xfrm xmlns:a="http://schemas.openxmlformats.org/drawingml/2006/main">
-            <a:off x="914400" y="1257300"/>
-            <a:ext cx="10363200" cy="781050"/>
+                <a16:creationId xmlns:a16="http://schemas.microsoft.com/office/drawing/2014/main" id="{E2296E58-EB74-44B5-A3D3-934A5523E2A8}"/>
+              </a:ext>
+            </a:extLst>
+          </p:cNvPr>
+          <p:cNvSpPr>
+            <a:spLocks xmlns:a="http://schemas.openxmlformats.org/drawingml/2006/main" noGrp="1"/>
+          </p:cNvSpPr>
+          <p:nvPr/>
+        </p:nvSpPr>
+        <p:spPr>
+          <a:xfrm xmlns:a="http://schemas.openxmlformats.org/drawingml/2006/main">
+            <a:off x="857250" y="1219200"/>
+            <a:ext cx="10477500" cy="742950"/>
           </a:xfrm>
           <a:prstGeom xmlns:a="http://schemas.openxmlformats.org/drawingml/2006/main" prst="rect">
             <a:avLst/>
@@ -8239,7 +8239,7 @@
           <a:lstStyle xmlns:a="http://schemas.openxmlformats.org/drawingml/2006/main"/>
           <a:p xmlns:a="http://schemas.openxmlformats.org/drawingml/2006/main">
             <a:pPr algn="ctr">
-              <a:defRPr sz="2175" b="1">
+              <a:defRPr sz="2100" b="1">
                 <a:solidFill>
                   <a:srgbClr val="17253A"/>
                 </a:solidFill>
@@ -8249,7 +8249,7 @@
               </a:defRPr>
             </a:pPr>
             <a:r>
-              <a:rPr sz="2175" b="1">
+              <a:rPr sz="2100" b="1">
                 <a:solidFill>
                   <a:srgbClr val="17253A"/>
                 </a:solidFill>
@@ -8267,28 +8267,30 @@
           <p:cNvPr id="11" name="">
             <a:extLst xmlns:a="http://schemas.openxmlformats.org/drawingml/2006/main">
               <a:ext uri="{FF2B5EF4-FFF2-40B4-BE49-F238E27FC236}">
-                <a16:creationId xmlns:a16="http://schemas.microsoft.com/office/drawing/2014/main" id="{DA2C34C7-440F-4C07-9A3C-F818E5F014E1}"/>
-              </a:ext>
-            </a:extLst>
-          </p:cNvPr>
-          <p:cNvSpPr>
-            <a:spLocks xmlns:a="http://schemas.openxmlformats.org/drawingml/2006/main" noGrp="1"/>
-          </p:cNvSpPr>
-          <p:nvPr/>
-        </p:nvSpPr>
-        <p:spPr>
-          <a:xfrm xmlns:a="http://schemas.openxmlformats.org/drawingml/2006/main">
-            <a:off x="1000125" y="2247900"/>
-            <a:ext cx="476250" cy="476250"/>
-          </a:xfrm>
-          <a:prstGeom xmlns:a="http://schemas.openxmlformats.org/drawingml/2006/main" prst="ellipse">
+                <a16:creationId xmlns:a16="http://schemas.microsoft.com/office/drawing/2014/main" id="{BA8061A7-E325-4139-BBDF-E2B4A22C4B45}"/>
+              </a:ext>
+            </a:extLst>
+          </p:cNvPr>
+          <p:cNvSpPr>
+            <a:spLocks xmlns:a="http://schemas.openxmlformats.org/drawingml/2006/main" noGrp="1"/>
+          </p:cNvSpPr>
+          <p:nvPr/>
+        </p:nvSpPr>
+        <p:spPr>
+          <a:xfrm xmlns:a="http://schemas.openxmlformats.org/drawingml/2006/main">
+            <a:off x="971550" y="2124075"/>
+            <a:ext cx="38100" cy="3524250"/>
+          </a:xfrm>
+          <a:prstGeom xmlns:a="http://schemas.openxmlformats.org/drawingml/2006/main" prst="rect">
             <a:avLst/>
           </a:prstGeom>
           <a:solidFill xmlns:a="http://schemas.openxmlformats.org/drawingml/2006/main">
-            <a:srgbClr val="18324A"/>
+            <a:srgbClr val="2C6E73"/>
           </a:solidFill>
           <a:ln xmlns:a="http://schemas.openxmlformats.org/drawingml/2006/main" w="0">
-            <a:noFill/>
+            <a:solidFill>
+              <a:srgbClr val="2C6E73"/>
+            </a:solidFill>
           </a:ln>
         </p:spPr>
       </p:sp>
@@ -8297,19 +8299,19 @@
           <p:cNvPr id="12" name="">
             <a:extLst xmlns:a="http://schemas.openxmlformats.org/drawingml/2006/main">
               <a:ext uri="{FF2B5EF4-FFF2-40B4-BE49-F238E27FC236}">
-                <a16:creationId xmlns:a16="http://schemas.microsoft.com/office/drawing/2014/main" id="{44BEDD5A-6B8A-4956-B00E-178EF80095F3}"/>
-              </a:ext>
-            </a:extLst>
-          </p:cNvPr>
-          <p:cNvSpPr>
-            <a:spLocks xmlns:a="http://schemas.openxmlformats.org/drawingml/2006/main" noGrp="1"/>
-          </p:cNvSpPr>
-          <p:nvPr/>
-        </p:nvSpPr>
-        <p:spPr>
-          <a:xfrm xmlns:a="http://schemas.openxmlformats.org/drawingml/2006/main">
-            <a:off x="1000125" y="2276475"/>
-            <a:ext cx="476250" cy="419100"/>
+                <a16:creationId xmlns:a16="http://schemas.microsoft.com/office/drawing/2014/main" id="{94B7A1D1-E961-4EEE-BE65-A7949079F3BA}"/>
+              </a:ext>
+            </a:extLst>
+          </p:cNvPr>
+          <p:cNvSpPr>
+            <a:spLocks xmlns:a="http://schemas.openxmlformats.org/drawingml/2006/main" noGrp="1"/>
+          </p:cNvSpPr>
+          <p:nvPr/>
+        </p:nvSpPr>
+        <p:spPr>
+          <a:xfrm xmlns:a="http://schemas.openxmlformats.org/drawingml/2006/main">
+            <a:off x="1162050" y="2200275"/>
+            <a:ext cx="400050" cy="400050"/>
           </a:xfrm>
           <a:prstGeom xmlns:a="http://schemas.openxmlformats.org/drawingml/2006/main" prst="rect">
             <a:avLst/>
@@ -8326,9 +8328,9 @@
           <a:lstStyle xmlns:a="http://schemas.openxmlformats.org/drawingml/2006/main"/>
           <a:p xmlns:a="http://schemas.openxmlformats.org/drawingml/2006/main">
             <a:pPr algn="ctr">
-              <a:defRPr sz="1350" b="1">
-                <a:solidFill>
-                  <a:srgbClr val="FFFFFF"/>
+              <a:defRPr sz="1125" b="1">
+                <a:solidFill>
+                  <a:srgbClr val="2C6E73"/>
                 </a:solidFill>
                 <a:latin typeface="Arial"/>
                 <a:ea typeface="Arial"/>
@@ -8336,9 +8338,9 @@
               </a:defRPr>
             </a:pPr>
             <a:r>
-              <a:rPr sz="1350" b="1">
-                <a:solidFill>
-                  <a:srgbClr val="FFFFFF"/>
+              <a:rPr sz="1125" b="1">
+                <a:solidFill>
+                  <a:srgbClr val="2C6E73"/>
                 </a:solidFill>
                 <a:latin typeface="Arial"/>
                 <a:ea typeface="Arial"/>
@@ -8354,19 +8356,19 @@
           <p:cNvPr id="13" name="">
             <a:extLst xmlns:a="http://schemas.openxmlformats.org/drawingml/2006/main">
               <a:ext uri="{FF2B5EF4-FFF2-40B4-BE49-F238E27FC236}">
-                <a16:creationId xmlns:a16="http://schemas.microsoft.com/office/drawing/2014/main" id="{6D4303C4-524E-45CE-8270-4559D0AF05D1}"/>
-              </a:ext>
-            </a:extLst>
-          </p:cNvPr>
-          <p:cNvSpPr>
-            <a:spLocks xmlns:a="http://schemas.openxmlformats.org/drawingml/2006/main" noGrp="1"/>
-          </p:cNvSpPr>
-          <p:nvPr/>
-        </p:nvSpPr>
-        <p:spPr>
-          <a:xfrm xmlns:a="http://schemas.openxmlformats.org/drawingml/2006/main">
-            <a:off x="1714500" y="2181225"/>
-            <a:ext cx="9429750" cy="609600"/>
+                <a16:creationId xmlns:a16="http://schemas.microsoft.com/office/drawing/2014/main" id="{551BC242-85B5-4DDD-ABDC-67EBC0AC798D}"/>
+              </a:ext>
+            </a:extLst>
+          </p:cNvPr>
+          <p:cNvSpPr>
+            <a:spLocks xmlns:a="http://schemas.openxmlformats.org/drawingml/2006/main" noGrp="1"/>
+          </p:cNvSpPr>
+          <p:nvPr/>
+        </p:nvSpPr>
+        <p:spPr>
+          <a:xfrm xmlns:a="http://schemas.openxmlformats.org/drawingml/2006/main">
+            <a:off x="1714500" y="2114550"/>
+            <a:ext cx="9525000" cy="638175"/>
           </a:xfrm>
           <a:prstGeom xmlns:a="http://schemas.openxmlformats.org/drawingml/2006/main" prst="rect">
             <a:avLst/>
@@ -8383,7 +8385,7 @@
           <a:lstStyle xmlns:a="http://schemas.openxmlformats.org/drawingml/2006/main"/>
           <a:p xmlns:a="http://schemas.openxmlformats.org/drawingml/2006/main">
             <a:pPr algn="l">
-              <a:defRPr sz="1500" b="0">
+              <a:defRPr sz="1575" b="0">
                 <a:solidFill>
                   <a:srgbClr val="17253A"/>
                 </a:solidFill>
@@ -8393,7 +8395,7 @@
               </a:defRPr>
             </a:pPr>
             <a:r>
-              <a:rPr sz="1500" b="0">
+              <a:rPr sz="1575" b="0">
                 <a:solidFill>
                   <a:srgbClr val="17253A"/>
                 </a:solidFill>
@@ -8401,7 +8403,7 @@
                 <a:ea typeface="Arial"/>
                 <a:cs typeface="Arial"/>
               </a:rPr>
-              <a:t>Identify the structure: Identify the number type and choose an efficient method.</a:t>
+              <a:t>3,250 ÷ 25 + 4.8 × 6</a:t>
             </a:r>
           </a:p>
         </p:txBody>
@@ -8411,28 +8413,30 @@
           <p:cNvPr id="14" name="">
             <a:extLst xmlns:a="http://schemas.openxmlformats.org/drawingml/2006/main">
               <a:ext uri="{FF2B5EF4-FFF2-40B4-BE49-F238E27FC236}">
-                <a16:creationId xmlns:a16="http://schemas.microsoft.com/office/drawing/2014/main" id="{AB2A982C-47CF-49C1-A4B9-238286280EE4}"/>
-              </a:ext>
-            </a:extLst>
-          </p:cNvPr>
-          <p:cNvSpPr>
-            <a:spLocks xmlns:a="http://schemas.openxmlformats.org/drawingml/2006/main" noGrp="1"/>
-          </p:cNvSpPr>
-          <p:nvPr/>
-        </p:nvSpPr>
-        <p:spPr>
-          <a:xfrm xmlns:a="http://schemas.openxmlformats.org/drawingml/2006/main">
-            <a:off x="1000125" y="2990850"/>
-            <a:ext cx="476250" cy="476250"/>
-          </a:xfrm>
-          <a:prstGeom xmlns:a="http://schemas.openxmlformats.org/drawingml/2006/main" prst="ellipse">
+                <a16:creationId xmlns:a16="http://schemas.microsoft.com/office/drawing/2014/main" id="{EF006CBC-A49A-469B-8514-9D0C5E464AD5}"/>
+              </a:ext>
+            </a:extLst>
+          </p:cNvPr>
+          <p:cNvSpPr>
+            <a:spLocks xmlns:a="http://schemas.openxmlformats.org/drawingml/2006/main" noGrp="1"/>
+          </p:cNvSpPr>
+          <p:nvPr/>
+        </p:nvSpPr>
+        <p:spPr>
+          <a:xfrm xmlns:a="http://schemas.openxmlformats.org/drawingml/2006/main">
+            <a:off x="1714500" y="2771775"/>
+            <a:ext cx="9334500" cy="9525"/>
+          </a:xfrm>
+          <a:prstGeom xmlns:a="http://schemas.openxmlformats.org/drawingml/2006/main" prst="rect">
             <a:avLst/>
           </a:prstGeom>
           <a:solidFill xmlns:a="http://schemas.openxmlformats.org/drawingml/2006/main">
-            <a:srgbClr val="2C6E73"/>
+            <a:srgbClr val="D9E0E6"/>
           </a:solidFill>
           <a:ln xmlns:a="http://schemas.openxmlformats.org/drawingml/2006/main" w="0">
-            <a:noFill/>
+            <a:solidFill>
+              <a:srgbClr val="D9E0E6"/>
+            </a:solidFill>
           </a:ln>
         </p:spPr>
       </p:sp>
@@ -8441,19 +8445,19 @@
           <p:cNvPr id="15" name="">
             <a:extLst xmlns:a="http://schemas.openxmlformats.org/drawingml/2006/main">
               <a:ext uri="{FF2B5EF4-FFF2-40B4-BE49-F238E27FC236}">
-                <a16:creationId xmlns:a16="http://schemas.microsoft.com/office/drawing/2014/main" id="{EC060788-27E4-47F1-B5E4-F2D3F36EA043}"/>
-              </a:ext>
-            </a:extLst>
-          </p:cNvPr>
-          <p:cNvSpPr>
-            <a:spLocks xmlns:a="http://schemas.openxmlformats.org/drawingml/2006/main" noGrp="1"/>
-          </p:cNvSpPr>
-          <p:nvPr/>
-        </p:nvSpPr>
-        <p:spPr>
-          <a:xfrm xmlns:a="http://schemas.openxmlformats.org/drawingml/2006/main">
-            <a:off x="1000125" y="3019425"/>
-            <a:ext cx="476250" cy="419100"/>
+                <a16:creationId xmlns:a16="http://schemas.microsoft.com/office/drawing/2014/main" id="{21CF6C99-F45C-40D8-A573-6167C38F1F07}"/>
+              </a:ext>
+            </a:extLst>
+          </p:cNvPr>
+          <p:cNvSpPr>
+            <a:spLocks xmlns:a="http://schemas.openxmlformats.org/drawingml/2006/main" noGrp="1"/>
+          </p:cNvSpPr>
+          <p:nvPr/>
+        </p:nvSpPr>
+        <p:spPr>
+          <a:xfrm xmlns:a="http://schemas.openxmlformats.org/drawingml/2006/main">
+            <a:off x="1162050" y="2905125"/>
+            <a:ext cx="400050" cy="400050"/>
           </a:xfrm>
           <a:prstGeom xmlns:a="http://schemas.openxmlformats.org/drawingml/2006/main" prst="rect">
             <a:avLst/>
@@ -8470,9 +8474,9 @@
           <a:lstStyle xmlns:a="http://schemas.openxmlformats.org/drawingml/2006/main"/>
           <a:p xmlns:a="http://schemas.openxmlformats.org/drawingml/2006/main">
             <a:pPr algn="ctr">
-              <a:defRPr sz="1350" b="1">
-                <a:solidFill>
-                  <a:srgbClr val="FFFFFF"/>
+              <a:defRPr sz="1125" b="1">
+                <a:solidFill>
+                  <a:srgbClr val="2C6E73"/>
                 </a:solidFill>
                 <a:latin typeface="Arial"/>
                 <a:ea typeface="Arial"/>
@@ -8480,9 +8484,9 @@
               </a:defRPr>
             </a:pPr>
             <a:r>
-              <a:rPr sz="1350" b="1">
-                <a:solidFill>
-                  <a:srgbClr val="FFFFFF"/>
+              <a:rPr sz="1125" b="1">
+                <a:solidFill>
+                  <a:srgbClr val="2C6E73"/>
                 </a:solidFill>
                 <a:latin typeface="Arial"/>
                 <a:ea typeface="Arial"/>
@@ -8498,19 +8502,19 @@
           <p:cNvPr id="16" name="">
             <a:extLst xmlns:a="http://schemas.openxmlformats.org/drawingml/2006/main">
               <a:ext uri="{FF2B5EF4-FFF2-40B4-BE49-F238E27FC236}">
-                <a16:creationId xmlns:a16="http://schemas.microsoft.com/office/drawing/2014/main" id="{E1E9C5D0-8D79-4A1F-9264-368729BA4504}"/>
-              </a:ext>
-            </a:extLst>
-          </p:cNvPr>
-          <p:cNvSpPr>
-            <a:spLocks xmlns:a="http://schemas.openxmlformats.org/drawingml/2006/main" noGrp="1"/>
-          </p:cNvSpPr>
-          <p:nvPr/>
-        </p:nvSpPr>
-        <p:spPr>
-          <a:xfrm xmlns:a="http://schemas.openxmlformats.org/drawingml/2006/main">
-            <a:off x="1714500" y="2924175"/>
-            <a:ext cx="9429750" cy="609600"/>
+                <a16:creationId xmlns:a16="http://schemas.microsoft.com/office/drawing/2014/main" id="{A5D70434-AA14-4D8C-B741-C47CE239845A}"/>
+              </a:ext>
+            </a:extLst>
+          </p:cNvPr>
+          <p:cNvSpPr>
+            <a:spLocks xmlns:a="http://schemas.openxmlformats.org/drawingml/2006/main" noGrp="1"/>
+          </p:cNvSpPr>
+          <p:nvPr/>
+        </p:nvSpPr>
+        <p:spPr>
+          <a:xfrm xmlns:a="http://schemas.openxmlformats.org/drawingml/2006/main">
+            <a:off x="1714500" y="2819400"/>
+            <a:ext cx="9525000" cy="638175"/>
           </a:xfrm>
           <a:prstGeom xmlns:a="http://schemas.openxmlformats.org/drawingml/2006/main" prst="rect">
             <a:avLst/>
@@ -8527,7 +8531,7 @@
           <a:lstStyle xmlns:a="http://schemas.openxmlformats.org/drawingml/2006/main"/>
           <a:p xmlns:a="http://schemas.openxmlformats.org/drawingml/2006/main">
             <a:pPr algn="l">
-              <a:defRPr sz="1500" b="0">
+              <a:defRPr sz="1575" b="0">
                 <a:solidFill>
                   <a:srgbClr val="17253A"/>
                 </a:solidFill>
@@ -8537,7 +8541,7 @@
               </a:defRPr>
             </a:pPr>
             <a:r>
-              <a:rPr sz="1500" b="0">
+              <a:rPr sz="1575" b="0">
                 <a:solidFill>
                   <a:srgbClr val="17253A"/>
                 </a:solidFill>
@@ -8545,7 +8549,7 @@
                 <a:ea typeface="Arial"/>
                 <a:cs typeface="Arial"/>
               </a:rPr>
-              <a:t>Set up the method: Keep place values or denominators aligned and record each stage.</a:t>
+              <a:t>3,250 ÷ 25 = 130</a:t>
             </a:r>
           </a:p>
         </p:txBody>
@@ -8555,28 +8559,30 @@
           <p:cNvPr id="17" name="">
             <a:extLst xmlns:a="http://schemas.openxmlformats.org/drawingml/2006/main">
               <a:ext uri="{FF2B5EF4-FFF2-40B4-BE49-F238E27FC236}">
-                <a16:creationId xmlns:a16="http://schemas.microsoft.com/office/drawing/2014/main" id="{A51EE136-1F16-4CD0-AF16-77735CDCEA2B}"/>
-              </a:ext>
-            </a:extLst>
-          </p:cNvPr>
-          <p:cNvSpPr>
-            <a:spLocks xmlns:a="http://schemas.openxmlformats.org/drawingml/2006/main" noGrp="1"/>
-          </p:cNvSpPr>
-          <p:nvPr/>
-        </p:nvSpPr>
-        <p:spPr>
-          <a:xfrm xmlns:a="http://schemas.openxmlformats.org/drawingml/2006/main">
-            <a:off x="1000125" y="3733800"/>
-            <a:ext cx="476250" cy="476250"/>
-          </a:xfrm>
-          <a:prstGeom xmlns:a="http://schemas.openxmlformats.org/drawingml/2006/main" prst="ellipse">
+                <a16:creationId xmlns:a16="http://schemas.microsoft.com/office/drawing/2014/main" id="{5694427F-C1DF-4E77-AD6F-4ED60EE40489}"/>
+              </a:ext>
+            </a:extLst>
+          </p:cNvPr>
+          <p:cNvSpPr>
+            <a:spLocks xmlns:a="http://schemas.openxmlformats.org/drawingml/2006/main" noGrp="1"/>
+          </p:cNvSpPr>
+          <p:nvPr/>
+        </p:nvSpPr>
+        <p:spPr>
+          <a:xfrm xmlns:a="http://schemas.openxmlformats.org/drawingml/2006/main">
+            <a:off x="1714500" y="3476625"/>
+            <a:ext cx="9334500" cy="9525"/>
+          </a:xfrm>
+          <a:prstGeom xmlns:a="http://schemas.openxmlformats.org/drawingml/2006/main" prst="rect">
             <a:avLst/>
           </a:prstGeom>
           <a:solidFill xmlns:a="http://schemas.openxmlformats.org/drawingml/2006/main">
-            <a:srgbClr val="2C6E73"/>
+            <a:srgbClr val="D9E0E6"/>
           </a:solidFill>
           <a:ln xmlns:a="http://schemas.openxmlformats.org/drawingml/2006/main" w="0">
-            <a:noFill/>
+            <a:solidFill>
+              <a:srgbClr val="D9E0E6"/>
+            </a:solidFill>
           </a:ln>
         </p:spPr>
       </p:sp>
@@ -8585,19 +8591,19 @@
           <p:cNvPr id="18" name="">
             <a:extLst xmlns:a="http://schemas.openxmlformats.org/drawingml/2006/main">
               <a:ext uri="{FF2B5EF4-FFF2-40B4-BE49-F238E27FC236}">
-                <a16:creationId xmlns:a16="http://schemas.microsoft.com/office/drawing/2014/main" id="{047B7234-D16D-44B2-8C27-F70443760B3F}"/>
-              </a:ext>
-            </a:extLst>
-          </p:cNvPr>
-          <p:cNvSpPr>
-            <a:spLocks xmlns:a="http://schemas.openxmlformats.org/drawingml/2006/main" noGrp="1"/>
-          </p:cNvSpPr>
-          <p:nvPr/>
-        </p:nvSpPr>
-        <p:spPr>
-          <a:xfrm xmlns:a="http://schemas.openxmlformats.org/drawingml/2006/main">
-            <a:off x="1000125" y="3762375"/>
-            <a:ext cx="476250" cy="419100"/>
+                <a16:creationId xmlns:a16="http://schemas.microsoft.com/office/drawing/2014/main" id="{E026F1B0-7898-4500-BDDA-A765A630EC58}"/>
+              </a:ext>
+            </a:extLst>
+          </p:cNvPr>
+          <p:cNvSpPr>
+            <a:spLocks xmlns:a="http://schemas.openxmlformats.org/drawingml/2006/main" noGrp="1"/>
+          </p:cNvSpPr>
+          <p:nvPr/>
+        </p:nvSpPr>
+        <p:spPr>
+          <a:xfrm xmlns:a="http://schemas.openxmlformats.org/drawingml/2006/main">
+            <a:off x="1162050" y="3609975"/>
+            <a:ext cx="400050" cy="400050"/>
           </a:xfrm>
           <a:prstGeom xmlns:a="http://schemas.openxmlformats.org/drawingml/2006/main" prst="rect">
             <a:avLst/>
@@ -8614,9 +8620,9 @@
           <a:lstStyle xmlns:a="http://schemas.openxmlformats.org/drawingml/2006/main"/>
           <a:p xmlns:a="http://schemas.openxmlformats.org/drawingml/2006/main">
             <a:pPr algn="ctr">
-              <a:defRPr sz="1350" b="1">
-                <a:solidFill>
-                  <a:srgbClr val="FFFFFF"/>
+              <a:defRPr sz="1125" b="1">
+                <a:solidFill>
+                  <a:srgbClr val="2C6E73"/>
                 </a:solidFill>
                 <a:latin typeface="Arial"/>
                 <a:ea typeface="Arial"/>
@@ -8624,9 +8630,9 @@
               </a:defRPr>
             </a:pPr>
             <a:r>
-              <a:rPr sz="1350" b="1">
-                <a:solidFill>
-                  <a:srgbClr val="FFFFFF"/>
+              <a:rPr sz="1125" b="1">
+                <a:solidFill>
+                  <a:srgbClr val="2C6E73"/>
                 </a:solidFill>
                 <a:latin typeface="Arial"/>
                 <a:ea typeface="Arial"/>
@@ -8642,19 +8648,19 @@
           <p:cNvPr id="19" name="">
             <a:extLst xmlns:a="http://schemas.openxmlformats.org/drawingml/2006/main">
               <a:ext uri="{FF2B5EF4-FFF2-40B4-BE49-F238E27FC236}">
-                <a16:creationId xmlns:a16="http://schemas.microsoft.com/office/drawing/2014/main" id="{C7945DF8-65A2-43D1-9015-B1E5929316BB}"/>
-              </a:ext>
-            </a:extLst>
-          </p:cNvPr>
-          <p:cNvSpPr>
-            <a:spLocks xmlns:a="http://schemas.openxmlformats.org/drawingml/2006/main" noGrp="1"/>
-          </p:cNvSpPr>
-          <p:nvPr/>
-        </p:nvSpPr>
-        <p:spPr>
-          <a:xfrm xmlns:a="http://schemas.openxmlformats.org/drawingml/2006/main">
-            <a:off x="1714500" y="3667125"/>
-            <a:ext cx="9429750" cy="609600"/>
+                <a16:creationId xmlns:a16="http://schemas.microsoft.com/office/drawing/2014/main" id="{C8A0F7B3-4DEA-4337-A715-5F0554DD12C4}"/>
+              </a:ext>
+            </a:extLst>
+          </p:cNvPr>
+          <p:cNvSpPr>
+            <a:spLocks xmlns:a="http://schemas.openxmlformats.org/drawingml/2006/main" noGrp="1"/>
+          </p:cNvSpPr>
+          <p:nvPr/>
+        </p:nvSpPr>
+        <p:spPr>
+          <a:xfrm xmlns:a="http://schemas.openxmlformats.org/drawingml/2006/main">
+            <a:off x="1714500" y="3524250"/>
+            <a:ext cx="9525000" cy="638175"/>
           </a:xfrm>
           <a:prstGeom xmlns:a="http://schemas.openxmlformats.org/drawingml/2006/main" prst="rect">
             <a:avLst/>
@@ -8671,7 +8677,7 @@
           <a:lstStyle xmlns:a="http://schemas.openxmlformats.org/drawingml/2006/main"/>
           <a:p xmlns:a="http://schemas.openxmlformats.org/drawingml/2006/main">
             <a:pPr algn="l">
-              <a:defRPr sz="1500" b="0">
+              <a:defRPr sz="1575" b="0">
                 <a:solidFill>
                   <a:srgbClr val="17253A"/>
                 </a:solidFill>
@@ -8681,7 +8687,7 @@
               </a:defRPr>
             </a:pPr>
             <a:r>
-              <a:rPr sz="1500" b="0">
+              <a:rPr sz="1575" b="0">
                 <a:solidFill>
                   <a:srgbClr val="17253A"/>
                 </a:solidFill>
@@ -8689,7 +8695,7 @@
                 <a:ea typeface="Arial"/>
                 <a:cs typeface="Arial"/>
               </a:rPr>
-              <a:t>Complete the calculation: 158.8.</a:t>
+              <a:t>4.8 × 6 = 28.8</a:t>
             </a:r>
           </a:p>
         </p:txBody>
@@ -8699,28 +8705,30 @@
           <p:cNvPr id="20" name="">
             <a:extLst xmlns:a="http://schemas.openxmlformats.org/drawingml/2006/main">
               <a:ext uri="{FF2B5EF4-FFF2-40B4-BE49-F238E27FC236}">
-                <a16:creationId xmlns:a16="http://schemas.microsoft.com/office/drawing/2014/main" id="{C564BEA4-4A99-4B7D-B47E-3D65842DE11A}"/>
-              </a:ext>
-            </a:extLst>
-          </p:cNvPr>
-          <p:cNvSpPr>
-            <a:spLocks xmlns:a="http://schemas.openxmlformats.org/drawingml/2006/main" noGrp="1"/>
-          </p:cNvSpPr>
-          <p:nvPr/>
-        </p:nvSpPr>
-        <p:spPr>
-          <a:xfrm xmlns:a="http://schemas.openxmlformats.org/drawingml/2006/main">
-            <a:off x="1000125" y="4476750"/>
-            <a:ext cx="476250" cy="476250"/>
-          </a:xfrm>
-          <a:prstGeom xmlns:a="http://schemas.openxmlformats.org/drawingml/2006/main" prst="ellipse">
+                <a16:creationId xmlns:a16="http://schemas.microsoft.com/office/drawing/2014/main" id="{5999F665-396D-400E-A84C-22C9103B5B23}"/>
+              </a:ext>
+            </a:extLst>
+          </p:cNvPr>
+          <p:cNvSpPr>
+            <a:spLocks xmlns:a="http://schemas.openxmlformats.org/drawingml/2006/main" noGrp="1"/>
+          </p:cNvSpPr>
+          <p:nvPr/>
+        </p:nvSpPr>
+        <p:spPr>
+          <a:xfrm xmlns:a="http://schemas.openxmlformats.org/drawingml/2006/main">
+            <a:off x="1714500" y="4181475"/>
+            <a:ext cx="9334500" cy="9525"/>
+          </a:xfrm>
+          <a:prstGeom xmlns:a="http://schemas.openxmlformats.org/drawingml/2006/main" prst="rect">
             <a:avLst/>
           </a:prstGeom>
           <a:solidFill xmlns:a="http://schemas.openxmlformats.org/drawingml/2006/main">
-            <a:srgbClr val="2C6E73"/>
+            <a:srgbClr val="D9E0E6"/>
           </a:solidFill>
           <a:ln xmlns:a="http://schemas.openxmlformats.org/drawingml/2006/main" w="0">
-            <a:noFill/>
+            <a:solidFill>
+              <a:srgbClr val="D9E0E6"/>
+            </a:solidFill>
           </a:ln>
         </p:spPr>
       </p:sp>
@@ -8729,19 +8737,19 @@
           <p:cNvPr id="21" name="">
             <a:extLst xmlns:a="http://schemas.openxmlformats.org/drawingml/2006/main">
               <a:ext uri="{FF2B5EF4-FFF2-40B4-BE49-F238E27FC236}">
-                <a16:creationId xmlns:a16="http://schemas.microsoft.com/office/drawing/2014/main" id="{A59F383A-BEA8-41E6-9B3D-3014C9D5C882}"/>
-              </a:ext>
-            </a:extLst>
-          </p:cNvPr>
-          <p:cNvSpPr>
-            <a:spLocks xmlns:a="http://schemas.openxmlformats.org/drawingml/2006/main" noGrp="1"/>
-          </p:cNvSpPr>
-          <p:nvPr/>
-        </p:nvSpPr>
-        <p:spPr>
-          <a:xfrm xmlns:a="http://schemas.openxmlformats.org/drawingml/2006/main">
-            <a:off x="1000125" y="4505325"/>
-            <a:ext cx="476250" cy="419100"/>
+                <a16:creationId xmlns:a16="http://schemas.microsoft.com/office/drawing/2014/main" id="{46EB293B-1733-4C9C-A61C-FFC803B4EB58}"/>
+              </a:ext>
+            </a:extLst>
+          </p:cNvPr>
+          <p:cNvSpPr>
+            <a:spLocks xmlns:a="http://schemas.openxmlformats.org/drawingml/2006/main" noGrp="1"/>
+          </p:cNvSpPr>
+          <p:nvPr/>
+        </p:nvSpPr>
+        <p:spPr>
+          <a:xfrm xmlns:a="http://schemas.openxmlformats.org/drawingml/2006/main">
+            <a:off x="1162050" y="4314825"/>
+            <a:ext cx="400050" cy="400050"/>
           </a:xfrm>
           <a:prstGeom xmlns:a="http://schemas.openxmlformats.org/drawingml/2006/main" prst="rect">
             <a:avLst/>
@@ -8758,9 +8766,9 @@
           <a:lstStyle xmlns:a="http://schemas.openxmlformats.org/drawingml/2006/main"/>
           <a:p xmlns:a="http://schemas.openxmlformats.org/drawingml/2006/main">
             <a:pPr algn="ctr">
-              <a:defRPr sz="1350" b="1">
-                <a:solidFill>
-                  <a:srgbClr val="FFFFFF"/>
+              <a:defRPr sz="1125" b="1">
+                <a:solidFill>
+                  <a:srgbClr val="2C6E73"/>
                 </a:solidFill>
                 <a:latin typeface="Arial"/>
                 <a:ea typeface="Arial"/>
@@ -8768,9 +8776,9 @@
               </a:defRPr>
             </a:pPr>
             <a:r>
-              <a:rPr sz="1350" b="1">
-                <a:solidFill>
-                  <a:srgbClr val="FFFFFF"/>
+              <a:rPr sz="1125" b="1">
+                <a:solidFill>
+                  <a:srgbClr val="2C6E73"/>
                 </a:solidFill>
                 <a:latin typeface="Arial"/>
                 <a:ea typeface="Arial"/>
@@ -8786,19 +8794,19 @@
           <p:cNvPr id="22" name="">
             <a:extLst xmlns:a="http://schemas.openxmlformats.org/drawingml/2006/main">
               <a:ext uri="{FF2B5EF4-FFF2-40B4-BE49-F238E27FC236}">
-                <a16:creationId xmlns:a16="http://schemas.microsoft.com/office/drawing/2014/main" id="{94240DD7-D4D1-4D3D-91A6-4E95641C22B6}"/>
-              </a:ext>
-            </a:extLst>
-          </p:cNvPr>
-          <p:cNvSpPr>
-            <a:spLocks xmlns:a="http://schemas.openxmlformats.org/drawingml/2006/main" noGrp="1"/>
-          </p:cNvSpPr>
-          <p:nvPr/>
-        </p:nvSpPr>
-        <p:spPr>
-          <a:xfrm xmlns:a="http://schemas.openxmlformats.org/drawingml/2006/main">
-            <a:off x="1714500" y="4410075"/>
-            <a:ext cx="9429750" cy="609600"/>
+                <a16:creationId xmlns:a16="http://schemas.microsoft.com/office/drawing/2014/main" id="{67E887D4-6FA2-4D75-A410-8001DBCAF2FE}"/>
+              </a:ext>
+            </a:extLst>
+          </p:cNvPr>
+          <p:cNvSpPr>
+            <a:spLocks xmlns:a="http://schemas.openxmlformats.org/drawingml/2006/main" noGrp="1"/>
+          </p:cNvSpPr>
+          <p:nvPr/>
+        </p:nvSpPr>
+        <p:spPr>
+          <a:xfrm xmlns:a="http://schemas.openxmlformats.org/drawingml/2006/main">
+            <a:off x="1714500" y="4229100"/>
+            <a:ext cx="9525000" cy="638175"/>
           </a:xfrm>
           <a:prstGeom xmlns:a="http://schemas.openxmlformats.org/drawingml/2006/main" prst="rect">
             <a:avLst/>
@@ -8815,9 +8823,9 @@
           <a:lstStyle xmlns:a="http://schemas.openxmlformats.org/drawingml/2006/main"/>
           <a:p xmlns:a="http://schemas.openxmlformats.org/drawingml/2006/main">
             <a:pPr algn="l">
-              <a:defRPr sz="1500" b="1">
-                <a:solidFill>
-                  <a:srgbClr val="2F785D"/>
+              <a:defRPr sz="1575" b="0">
+                <a:solidFill>
+                  <a:srgbClr val="17253A"/>
                 </a:solidFill>
                 <a:latin typeface="Arial"/>
                 <a:ea typeface="Arial"/>
@@ -8825,15 +8833,161 @@
               </a:defRPr>
             </a:pPr>
             <a:r>
-              <a:rPr sz="1500" b="1">
+              <a:rPr sz="1575" b="0">
+                <a:solidFill>
+                  <a:srgbClr val="17253A"/>
+                </a:solidFill>
+                <a:latin typeface="Arial"/>
+                <a:ea typeface="Arial"/>
+                <a:cs typeface="Arial"/>
+              </a:rPr>
+              <a:t>130 + 28.8</a:t>
+            </a:r>
+          </a:p>
+        </p:txBody>
+      </p:sp>
+      <p:sp>
+        <p:nvSpPr>
+          <p:cNvPr id="23" name="">
+            <a:extLst xmlns:a="http://schemas.openxmlformats.org/drawingml/2006/main">
+              <a:ext uri="{FF2B5EF4-FFF2-40B4-BE49-F238E27FC236}">
+                <a16:creationId xmlns:a16="http://schemas.microsoft.com/office/drawing/2014/main" id="{E90086CD-B916-4590-9FF1-FEB38D3F0D48}"/>
+              </a:ext>
+            </a:extLst>
+          </p:cNvPr>
+          <p:cNvSpPr>
+            <a:spLocks xmlns:a="http://schemas.openxmlformats.org/drawingml/2006/main" noGrp="1"/>
+          </p:cNvSpPr>
+          <p:nvPr/>
+        </p:nvSpPr>
+        <p:spPr>
+          <a:xfrm xmlns:a="http://schemas.openxmlformats.org/drawingml/2006/main">
+            <a:off x="1714500" y="4886325"/>
+            <a:ext cx="9334500" cy="9525"/>
+          </a:xfrm>
+          <a:prstGeom xmlns:a="http://schemas.openxmlformats.org/drawingml/2006/main" prst="rect">
+            <a:avLst/>
+          </a:prstGeom>
+          <a:solidFill xmlns:a="http://schemas.openxmlformats.org/drawingml/2006/main">
+            <a:srgbClr val="D9E0E6"/>
+          </a:solidFill>
+          <a:ln xmlns:a="http://schemas.openxmlformats.org/drawingml/2006/main" w="0">
+            <a:solidFill>
+              <a:srgbClr val="D9E0E6"/>
+            </a:solidFill>
+          </a:ln>
+        </p:spPr>
+      </p:sp>
+      <p:sp>
+        <p:nvSpPr>
+          <p:cNvPr id="24" name="">
+            <a:extLst xmlns:a="http://schemas.openxmlformats.org/drawingml/2006/main">
+              <a:ext uri="{FF2B5EF4-FFF2-40B4-BE49-F238E27FC236}">
+                <a16:creationId xmlns:a16="http://schemas.microsoft.com/office/drawing/2014/main" id="{4B6ABEB1-CBEB-4477-ADD0-1BC4936246EB}"/>
+              </a:ext>
+            </a:extLst>
+          </p:cNvPr>
+          <p:cNvSpPr>
+            <a:spLocks xmlns:a="http://schemas.openxmlformats.org/drawingml/2006/main" noGrp="1"/>
+          </p:cNvSpPr>
+          <p:nvPr/>
+        </p:nvSpPr>
+        <p:spPr>
+          <a:xfrm xmlns:a="http://schemas.openxmlformats.org/drawingml/2006/main">
+            <a:off x="1162050" y="5019675"/>
+            <a:ext cx="400050" cy="400050"/>
+          </a:xfrm>
+          <a:prstGeom xmlns:a="http://schemas.openxmlformats.org/drawingml/2006/main" prst="rect">
+            <a:avLst/>
+          </a:prstGeom>
+          <a:noFill xmlns:a="http://schemas.openxmlformats.org/drawingml/2006/main"/>
+          <a:ln xmlns:a="http://schemas.openxmlformats.org/drawingml/2006/main" w="0">
+            <a:noFill/>
+          </a:ln>
+        </p:spPr>
+        <p:txBody>
+          <a:bodyPr xmlns:a="http://schemas.openxmlformats.org/drawingml/2006/main" anchor="ctr">
+            <a:normAutofit fontScale="100000"/>
+          </a:bodyPr>
+          <a:lstStyle xmlns:a="http://schemas.openxmlformats.org/drawingml/2006/main"/>
+          <a:p xmlns:a="http://schemas.openxmlformats.org/drawingml/2006/main">
+            <a:pPr algn="ctr">
+              <a:defRPr sz="1125" b="1">
                 <a:solidFill>
                   <a:srgbClr val="2F785D"/>
                 </a:solidFill>
                 <a:latin typeface="Arial"/>
                 <a:ea typeface="Arial"/>
                 <a:cs typeface="Arial"/>
+              </a:defRPr>
+            </a:pPr>
+            <a:r>
+              <a:rPr sz="1125" b="1">
+                <a:solidFill>
+                  <a:srgbClr val="2F785D"/>
+                </a:solidFill>
+                <a:latin typeface="Arial"/>
+                <a:ea typeface="Arial"/>
+                <a:cs typeface="Arial"/>
               </a:rPr>
-              <a:t>Check the result: Simplify where needed and check the result for size and reasonableness.</a:t>
+              <a:t>5</a:t>
+            </a:r>
+          </a:p>
+        </p:txBody>
+      </p:sp>
+      <p:sp>
+        <p:nvSpPr>
+          <p:cNvPr id="25" name="">
+            <a:extLst xmlns:a="http://schemas.openxmlformats.org/drawingml/2006/main">
+              <a:ext uri="{FF2B5EF4-FFF2-40B4-BE49-F238E27FC236}">
+                <a16:creationId xmlns:a16="http://schemas.microsoft.com/office/drawing/2014/main" id="{5DCA4FDC-E8E6-47CC-ACCB-380AC64BA13A}"/>
+              </a:ext>
+            </a:extLst>
+          </p:cNvPr>
+          <p:cNvSpPr>
+            <a:spLocks xmlns:a="http://schemas.openxmlformats.org/drawingml/2006/main" noGrp="1"/>
+          </p:cNvSpPr>
+          <p:nvPr/>
+        </p:nvSpPr>
+        <p:spPr>
+          <a:xfrm xmlns:a="http://schemas.openxmlformats.org/drawingml/2006/main">
+            <a:off x="1714500" y="4933950"/>
+            <a:ext cx="9525000" cy="638175"/>
+          </a:xfrm>
+          <a:prstGeom xmlns:a="http://schemas.openxmlformats.org/drawingml/2006/main" prst="rect">
+            <a:avLst/>
+          </a:prstGeom>
+          <a:noFill xmlns:a="http://schemas.openxmlformats.org/drawingml/2006/main"/>
+          <a:ln xmlns:a="http://schemas.openxmlformats.org/drawingml/2006/main" w="0">
+            <a:noFill/>
+          </a:ln>
+        </p:spPr>
+        <p:txBody>
+          <a:bodyPr xmlns:a="http://schemas.openxmlformats.org/drawingml/2006/main" anchor="ctr">
+            <a:normAutofit fontScale="100000"/>
+          </a:bodyPr>
+          <a:lstStyle xmlns:a="http://schemas.openxmlformats.org/drawingml/2006/main"/>
+          <a:p xmlns:a="http://schemas.openxmlformats.org/drawingml/2006/main">
+            <a:pPr algn="l">
+              <a:defRPr sz="1575" b="1">
+                <a:solidFill>
+                  <a:srgbClr val="2F785D"/>
+                </a:solidFill>
+                <a:latin typeface="Arial"/>
+                <a:ea typeface="Arial"/>
+                <a:cs typeface="Arial"/>
+              </a:defRPr>
+            </a:pPr>
+            <a:r>
+              <a:rPr sz="1575" b="1">
+                <a:solidFill>
+                  <a:srgbClr val="2F785D"/>
+                </a:solidFill>
+                <a:latin typeface="Arial"/>
+                <a:ea typeface="Arial"/>
+                <a:cs typeface="Arial"/>
+              </a:rPr>
+              <a:t>158.8</a:t>
             </a:r>
           </a:p>
         </p:txBody>
@@ -8841,7 +8995,7 @@
     </p:spTree>
     <p:extLst>
       <p:ext uri="{BB962C8B-B14F-4D97-AF65-F5344CB8AC3E}">
-        <p14:creationId xmlns:p14="http://schemas.microsoft.com/office/powerpoint/2010/main" val="1400829500"/>
+        <p14:creationId xmlns:p14="http://schemas.microsoft.com/office/powerpoint/2010/main" val="1931818458"/>
       </p:ext>
     </p:extLst>
   </p:cSld>
@@ -9078,6 +9232,51 @@
                       </p:childTnLst>
                     </p:cTn>
                   </p:par>
+                  <p:par>
+                    <p:cTn id="23" fill="hold">
+                      <p:stCondLst>
+                        <p:cond delay="indefinite"/>
+                      </p:stCondLst>
+                      <p:childTnLst>
+                        <p:par>
+                          <p:cTn id="24" fill="hold">
+                            <p:stCondLst>
+                              <p:cond delay="0"/>
+                            </p:stCondLst>
+                            <p:childTnLst>
+                              <p:par>
+                                <p:cTn id="25" presetID="1" presetClass="entr" presetSubtype="0" fill="hold" grpId="0" nodeType="clickEffect">
+                                  <p:stCondLst>
+                                    <p:cond delay="0"/>
+                                  </p:stCondLst>
+                                  <p:childTnLst>
+                                    <p:set>
+                                      <p:cBhvr>
+                                        <p:cTn id="26" dur="1" fill="hold">
+                                          <p:stCondLst>
+                                            <p:cond delay="0"/>
+                                          </p:stCondLst>
+                                        </p:cTn>
+                                        <p:tgtEl>
+                                          <p:spTgt spid="25"/>
+                                        </p:tgtEl>
+                                        <p:attrNameLst>
+                                          <p:attrName>style.visibility</p:attrName>
+                                        </p:attrNameLst>
+                                      </p:cBhvr>
+                                      <p:to>
+                                        <p:strVal val="visible"/>
+                                      </p:to>
+                                    </p:set>
+                                  </p:childTnLst>
+                                </p:cTn>
+                              </p:par>
+                            </p:childTnLst>
+                          </p:cTn>
+                        </p:par>
+                      </p:childTnLst>
+                    </p:cTn>
+                  </p:par>
                 </p:childTnLst>
               </p:cTn>
               <p:prevCondLst>
@@ -9105,6 +9304,7 @@
       <p:bldP spid="16" grpId="0"/>
       <p:bldP spid="19" grpId="0"/>
       <p:bldP spid="22" grpId="0"/>
+      <p:bldP spid="25" grpId="0"/>
     </p:bldLst>
   </p:timing>
 </p:sld>
@@ -9134,7 +9334,7 @@
           <p:cNvPr id="15" name="">
             <a:extLst xmlns:a="http://schemas.openxmlformats.org/drawingml/2006/main">
               <a:ext uri="{FF2B5EF4-FFF2-40B4-BE49-F238E27FC236}">
-                <a16:creationId xmlns:a16="http://schemas.microsoft.com/office/drawing/2014/main" id="{DF95D040-6DDF-4CBF-BF4C-56A1D0C8BACD}"/>
+                <a16:creationId xmlns:a16="http://schemas.microsoft.com/office/drawing/2014/main" id="{87BAB4B5-0332-4E17-B4D1-7EADB3972131}"/>
               </a:ext>
             </a:extLst>
           </p:cNvPr>
@@ -9166,7 +9366,7 @@
           <p:cNvPr id="2" name="">
             <a:extLst xmlns:a="http://schemas.openxmlformats.org/drawingml/2006/main">
               <a:ext uri="{FF2B5EF4-FFF2-40B4-BE49-F238E27FC236}">
-                <a16:creationId xmlns:a16="http://schemas.microsoft.com/office/drawing/2014/main" id="{24A7B1B7-F3FE-48B5-861F-0C89842CFC6D}"/>
+                <a16:creationId xmlns:a16="http://schemas.microsoft.com/office/drawing/2014/main" id="{0B92382B-1500-4003-8275-5CF7893CA11C}"/>
               </a:ext>
             </a:extLst>
           </p:cNvPr>
@@ -9223,7 +9423,7 @@
           <p:cNvPr id="3" name="">
             <a:extLst xmlns:a="http://schemas.openxmlformats.org/drawingml/2006/main">
               <a:ext uri="{FF2B5EF4-FFF2-40B4-BE49-F238E27FC236}">
-                <a16:creationId xmlns:a16="http://schemas.microsoft.com/office/drawing/2014/main" id="{285238FD-7596-46D9-B4C6-8E1E70146256}"/>
+                <a16:creationId xmlns:a16="http://schemas.microsoft.com/office/drawing/2014/main" id="{63B21680-F002-45D3-BF67-1EAB3A7E0799}"/>
               </a:ext>
             </a:extLst>
           </p:cNvPr>
@@ -9255,7 +9455,7 @@
           <p:cNvPr id="4" name="">
             <a:extLst xmlns:a="http://schemas.openxmlformats.org/drawingml/2006/main">
               <a:ext uri="{FF2B5EF4-FFF2-40B4-BE49-F238E27FC236}">
-                <a16:creationId xmlns:a16="http://schemas.microsoft.com/office/drawing/2014/main" id="{34F2087A-D2F4-476A-A681-F6B2E3D34D0B}"/>
+                <a16:creationId xmlns:a16="http://schemas.microsoft.com/office/drawing/2014/main" id="{EE5A8031-6E0F-44AB-B772-4377803BE86B}"/>
               </a:ext>
             </a:extLst>
           </p:cNvPr>
@@ -9312,7 +9512,7 @@
           <p:cNvPr id="5" name="">
             <a:extLst xmlns:a="http://schemas.openxmlformats.org/drawingml/2006/main">
               <a:ext uri="{FF2B5EF4-FFF2-40B4-BE49-F238E27FC236}">
-                <a16:creationId xmlns:a16="http://schemas.microsoft.com/office/drawing/2014/main" id="{5837A083-14E1-464C-8485-E19B628CFFCE}"/>
+                <a16:creationId xmlns:a16="http://schemas.microsoft.com/office/drawing/2014/main" id="{029D345C-CCDA-4579-8702-2A7CBEB27AA1}"/>
               </a:ext>
             </a:extLst>
           </p:cNvPr>
@@ -9369,7 +9569,7 @@
           <p:cNvPr id="6" name="">
             <a:extLst xmlns:a="http://schemas.openxmlformats.org/drawingml/2006/main">
               <a:ext uri="{FF2B5EF4-FFF2-40B4-BE49-F238E27FC236}">
-                <a16:creationId xmlns:a16="http://schemas.microsoft.com/office/drawing/2014/main" id="{CA746982-863C-4E15-AC7B-291224771744}"/>
+                <a16:creationId xmlns:a16="http://schemas.microsoft.com/office/drawing/2014/main" id="{A02C90A9-4F43-4DE7-9B76-16F406831FA5}"/>
               </a:ext>
             </a:extLst>
           </p:cNvPr>
@@ -9426,7 +9626,7 @@
           <p:cNvPr id="7" name="">
             <a:extLst xmlns:a="http://schemas.openxmlformats.org/drawingml/2006/main">
               <a:ext uri="{FF2B5EF4-FFF2-40B4-BE49-F238E27FC236}">
-                <a16:creationId xmlns:a16="http://schemas.microsoft.com/office/drawing/2014/main" id="{96D83B70-91E5-46BD-90C1-ECD06E41EB1B}"/>
+                <a16:creationId xmlns:a16="http://schemas.microsoft.com/office/drawing/2014/main" id="{5C41B306-C0CC-4DCB-803B-1B268ADF2A14}"/>
               </a:ext>
             </a:extLst>
           </p:cNvPr>
@@ -9458,7 +9658,7 @@
           <p:cNvPr id="8" name="">
             <a:extLst xmlns:a="http://schemas.openxmlformats.org/drawingml/2006/main">
               <a:ext uri="{FF2B5EF4-FFF2-40B4-BE49-F238E27FC236}">
-                <a16:creationId xmlns:a16="http://schemas.microsoft.com/office/drawing/2014/main" id="{9E1853EB-67BA-418D-B38C-60D98AA10350}"/>
+                <a16:creationId xmlns:a16="http://schemas.microsoft.com/office/drawing/2014/main" id="{271548B4-F13E-4E3A-8E3E-E83F030D179F}"/>
               </a:ext>
             </a:extLst>
           </p:cNvPr>
@@ -9515,7 +9715,7 @@
           <p:cNvPr id="9" name="">
             <a:extLst xmlns:a="http://schemas.openxmlformats.org/drawingml/2006/main">
               <a:ext uri="{FF2B5EF4-FFF2-40B4-BE49-F238E27FC236}">
-                <a16:creationId xmlns:a16="http://schemas.microsoft.com/office/drawing/2014/main" id="{28355B82-AD4E-429E-B8BD-931A126C3276}"/>
+                <a16:creationId xmlns:a16="http://schemas.microsoft.com/office/drawing/2014/main" id="{6512D0BA-F357-4F6C-B313-3DF19B891066}"/>
               </a:ext>
             </a:extLst>
           </p:cNvPr>
@@ -9572,7 +9772,7 @@
           <p:cNvPr id="10" name="">
             <a:extLst xmlns:a="http://schemas.openxmlformats.org/drawingml/2006/main">
               <a:ext uri="{FF2B5EF4-FFF2-40B4-BE49-F238E27FC236}">
-                <a16:creationId xmlns:a16="http://schemas.microsoft.com/office/drawing/2014/main" id="{3DBDD8D6-D3A4-44F2-9EA9-E00B4B88B3EA}"/>
+                <a16:creationId xmlns:a16="http://schemas.microsoft.com/office/drawing/2014/main" id="{7AED87E8-FE61-434F-B53B-36D75F3C6870}"/>
               </a:ext>
             </a:extLst>
           </p:cNvPr>
@@ -9629,7 +9829,7 @@
           <p:cNvPr id="11" name="">
             <a:extLst xmlns:a="http://schemas.openxmlformats.org/drawingml/2006/main">
               <a:ext uri="{FF2B5EF4-FFF2-40B4-BE49-F238E27FC236}">
-                <a16:creationId xmlns:a16="http://schemas.microsoft.com/office/drawing/2014/main" id="{FA0EC8D6-5188-485E-ADB0-8F79CEB78C68}"/>
+                <a16:creationId xmlns:a16="http://schemas.microsoft.com/office/drawing/2014/main" id="{D8C33EA7-4C1E-4A46-B4AD-177F3E1438B0}"/>
               </a:ext>
             </a:extLst>
           </p:cNvPr>
@@ -9686,7 +9886,7 @@
           <p:cNvPr id="12" name="">
             <a:extLst xmlns:a="http://schemas.openxmlformats.org/drawingml/2006/main">
               <a:ext uri="{FF2B5EF4-FFF2-40B4-BE49-F238E27FC236}">
-                <a16:creationId xmlns:a16="http://schemas.microsoft.com/office/drawing/2014/main" id="{49ABC195-BC4C-486B-AFB5-EAA78CE12A7A}"/>
+                <a16:creationId xmlns:a16="http://schemas.microsoft.com/office/drawing/2014/main" id="{7BA087FD-B955-4C98-AAC2-9FA5F7FBDAE3}"/>
               </a:ext>
             </a:extLst>
           </p:cNvPr>
@@ -9718,7 +9918,7 @@
           <p:cNvPr id="13" name="">
             <a:extLst xmlns:a="http://schemas.openxmlformats.org/drawingml/2006/main">
               <a:ext uri="{FF2B5EF4-FFF2-40B4-BE49-F238E27FC236}">
-                <a16:creationId xmlns:a16="http://schemas.microsoft.com/office/drawing/2014/main" id="{F0D1643C-8BB4-4334-A80A-07C2314C220E}"/>
+                <a16:creationId xmlns:a16="http://schemas.microsoft.com/office/drawing/2014/main" id="{B42B83AF-EC07-45E3-BC3F-B5B8DE0F26C6}"/>
               </a:ext>
             </a:extLst>
           </p:cNvPr>
@@ -9775,7 +9975,7 @@
           <p:cNvPr id="14" name="">
             <a:extLst xmlns:a="http://schemas.openxmlformats.org/drawingml/2006/main">
               <a:ext uri="{FF2B5EF4-FFF2-40B4-BE49-F238E27FC236}">
-                <a16:creationId xmlns:a16="http://schemas.microsoft.com/office/drawing/2014/main" id="{7E9F2695-FF83-4C5D-BD85-A7608AD1DEF9}"/>
+                <a16:creationId xmlns:a16="http://schemas.microsoft.com/office/drawing/2014/main" id="{DE8D41AB-4906-4D0A-AF21-617282014B20}"/>
               </a:ext>
             </a:extLst>
           </p:cNvPr>
@@ -9830,7 +10030,7 @@
     </p:spTree>
     <p:extLst>
       <p:ext uri="{BB962C8B-B14F-4D97-AF65-F5344CB8AC3E}">
-        <p14:creationId xmlns:p14="http://schemas.microsoft.com/office/powerpoint/2010/main" val="2134628052"/>
+        <p14:creationId xmlns:p14="http://schemas.microsoft.com/office/powerpoint/2010/main" val="445164014"/>
       </p:ext>
     </p:extLst>
   </p:cSld>
@@ -10031,7 +10231,7 @@
           <p:cNvPr id="16" name="">
             <a:extLst xmlns:a="http://schemas.openxmlformats.org/drawingml/2006/main">
               <a:ext uri="{FF2B5EF4-FFF2-40B4-BE49-F238E27FC236}">
-                <a16:creationId xmlns:a16="http://schemas.microsoft.com/office/drawing/2014/main" id="{88A8153C-A9F2-4380-BB77-28196CFC0C49}"/>
+                <a16:creationId xmlns:a16="http://schemas.microsoft.com/office/drawing/2014/main" id="{A10A241F-BD0D-4333-8023-7EFDAFA3E980}"/>
               </a:ext>
             </a:extLst>
           </p:cNvPr>
@@ -10063,7 +10263,7 @@
           <p:cNvPr id="2" name="">
             <a:extLst xmlns:a="http://schemas.openxmlformats.org/drawingml/2006/main">
               <a:ext uri="{FF2B5EF4-FFF2-40B4-BE49-F238E27FC236}">
-                <a16:creationId xmlns:a16="http://schemas.microsoft.com/office/drawing/2014/main" id="{3E5D1EF2-996B-471B-891F-8B9CD72034F3}"/>
+                <a16:creationId xmlns:a16="http://schemas.microsoft.com/office/drawing/2014/main" id="{B740F539-7AEB-4B09-A4CB-E194A1CB71DF}"/>
               </a:ext>
             </a:extLst>
           </p:cNvPr>
@@ -10120,7 +10320,7 @@
           <p:cNvPr id="3" name="">
             <a:extLst xmlns:a="http://schemas.openxmlformats.org/drawingml/2006/main">
               <a:ext uri="{FF2B5EF4-FFF2-40B4-BE49-F238E27FC236}">
-                <a16:creationId xmlns:a16="http://schemas.microsoft.com/office/drawing/2014/main" id="{F0F1FC3A-7847-442C-B6C8-BF9ABBAEB1E4}"/>
+                <a16:creationId xmlns:a16="http://schemas.microsoft.com/office/drawing/2014/main" id="{11197F78-684B-4E69-9B00-D6F21A6AFD04}"/>
               </a:ext>
             </a:extLst>
           </p:cNvPr>
@@ -10152,7 +10352,7 @@
           <p:cNvPr id="4" name="">
             <a:extLst xmlns:a="http://schemas.openxmlformats.org/drawingml/2006/main">
               <a:ext uri="{FF2B5EF4-FFF2-40B4-BE49-F238E27FC236}">
-                <a16:creationId xmlns:a16="http://schemas.microsoft.com/office/drawing/2014/main" id="{BA36C077-2A12-4703-B130-0ACC17B28F4A}"/>
+                <a16:creationId xmlns:a16="http://schemas.microsoft.com/office/drawing/2014/main" id="{C8B3141F-EAC6-48B3-8449-1374319FF160}"/>
               </a:ext>
             </a:extLst>
           </p:cNvPr>
@@ -10209,7 +10409,7 @@
           <p:cNvPr id="5" name="">
             <a:extLst xmlns:a="http://schemas.openxmlformats.org/drawingml/2006/main">
               <a:ext uri="{FF2B5EF4-FFF2-40B4-BE49-F238E27FC236}">
-                <a16:creationId xmlns:a16="http://schemas.microsoft.com/office/drawing/2014/main" id="{AF3C05A6-3215-42EE-B099-5DA690C51BBE}"/>
+                <a16:creationId xmlns:a16="http://schemas.microsoft.com/office/drawing/2014/main" id="{6DCAC4CE-D876-4BAE-AF79-149EF87134E1}"/>
               </a:ext>
             </a:extLst>
           </p:cNvPr>
@@ -10266,7 +10466,7 @@
           <p:cNvPr id="6" name="">
             <a:extLst xmlns:a="http://schemas.openxmlformats.org/drawingml/2006/main">
               <a:ext uri="{FF2B5EF4-FFF2-40B4-BE49-F238E27FC236}">
-                <a16:creationId xmlns:a16="http://schemas.microsoft.com/office/drawing/2014/main" id="{312AF400-C305-4CF8-826F-8B7D3B84A288}"/>
+                <a16:creationId xmlns:a16="http://schemas.microsoft.com/office/drawing/2014/main" id="{EF5F871F-7EFE-4E31-97FC-3FF78B9560F8}"/>
               </a:ext>
             </a:extLst>
           </p:cNvPr>
@@ -10323,7 +10523,7 @@
           <p:cNvPr id="7" name="">
             <a:extLst xmlns:a="http://schemas.openxmlformats.org/drawingml/2006/main">
               <a:ext uri="{FF2B5EF4-FFF2-40B4-BE49-F238E27FC236}">
-                <a16:creationId xmlns:a16="http://schemas.microsoft.com/office/drawing/2014/main" id="{8472A593-DC35-48F2-9AA0-E3D15DB257FB}"/>
+                <a16:creationId xmlns:a16="http://schemas.microsoft.com/office/drawing/2014/main" id="{23318F5B-78E9-4F0A-BB93-006785A275B9}"/>
               </a:ext>
             </a:extLst>
           </p:cNvPr>
@@ -10355,7 +10555,7 @@
           <p:cNvPr id="8" name="">
             <a:extLst xmlns:a="http://schemas.openxmlformats.org/drawingml/2006/main">
               <a:ext uri="{FF2B5EF4-FFF2-40B4-BE49-F238E27FC236}">
-                <a16:creationId xmlns:a16="http://schemas.microsoft.com/office/drawing/2014/main" id="{CD23CF11-DD9C-4B2C-BD70-EF420ADB5E36}"/>
+                <a16:creationId xmlns:a16="http://schemas.microsoft.com/office/drawing/2014/main" id="{AAB33FF7-89DC-4C05-9DEB-A77538C7D326}"/>
               </a:ext>
             </a:extLst>
           </p:cNvPr>
@@ -10412,7 +10612,7 @@
           <p:cNvPr id="9" name="">
             <a:extLst xmlns:a="http://schemas.openxmlformats.org/drawingml/2006/main">
               <a:ext uri="{FF2B5EF4-FFF2-40B4-BE49-F238E27FC236}">
-                <a16:creationId xmlns:a16="http://schemas.microsoft.com/office/drawing/2014/main" id="{8286FC95-056A-49AB-B0C0-85AE39638FAE}"/>
+                <a16:creationId xmlns:a16="http://schemas.microsoft.com/office/drawing/2014/main" id="{EC2EB442-2F5B-47C5-9D3D-DF05F977FE8F}"/>
               </a:ext>
             </a:extLst>
           </p:cNvPr>
@@ -10469,7 +10669,7 @@
           <p:cNvPr id="10" name="">
             <a:extLst xmlns:a="http://schemas.openxmlformats.org/drawingml/2006/main">
               <a:ext uri="{FF2B5EF4-FFF2-40B4-BE49-F238E27FC236}">
-                <a16:creationId xmlns:a16="http://schemas.microsoft.com/office/drawing/2014/main" id="{FAD1E64B-43FF-475A-A210-CA6BFDCF2B82}"/>
+                <a16:creationId xmlns:a16="http://schemas.microsoft.com/office/drawing/2014/main" id="{D866E67E-2F69-4215-9F18-4DAA3E1B6FB0}"/>
               </a:ext>
             </a:extLst>
           </p:cNvPr>
@@ -10526,7 +10726,7 @@
           <p:cNvPr id="11" name="">
             <a:extLst xmlns:a="http://schemas.openxmlformats.org/drawingml/2006/main">
               <a:ext uri="{FF2B5EF4-FFF2-40B4-BE49-F238E27FC236}">
-                <a16:creationId xmlns:a16="http://schemas.microsoft.com/office/drawing/2014/main" id="{8D8E0882-1996-4DA5-BF70-EE3A32E479C3}"/>
+                <a16:creationId xmlns:a16="http://schemas.microsoft.com/office/drawing/2014/main" id="{8E951EC0-A157-4D32-BDAA-FE9BC664F99E}"/>
               </a:ext>
             </a:extLst>
           </p:cNvPr>
@@ -10583,7 +10783,7 @@
           <p:cNvPr id="12" name="">
             <a:extLst xmlns:a="http://schemas.openxmlformats.org/drawingml/2006/main">
               <a:ext uri="{FF2B5EF4-FFF2-40B4-BE49-F238E27FC236}">
-                <a16:creationId xmlns:a16="http://schemas.microsoft.com/office/drawing/2014/main" id="{2C1F5D95-3245-4E79-A84D-33992E7E786C}"/>
+                <a16:creationId xmlns:a16="http://schemas.microsoft.com/office/drawing/2014/main" id="{EA054C79-81C6-4B68-954A-B5D4E7B4A4D7}"/>
               </a:ext>
             </a:extLst>
           </p:cNvPr>
@@ -10640,7 +10840,7 @@
           <p:cNvPr id="13" name="">
             <a:extLst xmlns:a="http://schemas.openxmlformats.org/drawingml/2006/main">
               <a:ext uri="{FF2B5EF4-FFF2-40B4-BE49-F238E27FC236}">
-                <a16:creationId xmlns:a16="http://schemas.microsoft.com/office/drawing/2014/main" id="{1E159308-DB8F-414C-93B8-6F132728956C}"/>
+                <a16:creationId xmlns:a16="http://schemas.microsoft.com/office/drawing/2014/main" id="{D4EC24C3-1425-480A-9060-E5BFFE4D0165}"/>
               </a:ext>
             </a:extLst>
           </p:cNvPr>
@@ -10697,7 +10897,7 @@
           <p:cNvPr id="14" name="">
             <a:extLst xmlns:a="http://schemas.openxmlformats.org/drawingml/2006/main">
               <a:ext uri="{FF2B5EF4-FFF2-40B4-BE49-F238E27FC236}">
-                <a16:creationId xmlns:a16="http://schemas.microsoft.com/office/drawing/2014/main" id="{50B4981A-1233-4497-ABF2-9AA1C262521D}"/>
+                <a16:creationId xmlns:a16="http://schemas.microsoft.com/office/drawing/2014/main" id="{7FB847FA-571F-4A05-B443-C6150FABFDFF}"/>
               </a:ext>
             </a:extLst>
           </p:cNvPr>
@@ -10754,7 +10954,7 @@
           <p:cNvPr id="15" name="">
             <a:extLst xmlns:a="http://schemas.openxmlformats.org/drawingml/2006/main">
               <a:ext uri="{FF2B5EF4-FFF2-40B4-BE49-F238E27FC236}">
-                <a16:creationId xmlns:a16="http://schemas.microsoft.com/office/drawing/2014/main" id="{F51F8E67-6E20-47E0-8E9E-683AEA7CE55C}"/>
+                <a16:creationId xmlns:a16="http://schemas.microsoft.com/office/drawing/2014/main" id="{6D19439D-2811-4733-9C7B-EA43EAD8BE41}"/>
               </a:ext>
             </a:extLst>
           </p:cNvPr>
@@ -10809,7 +11009,7 @@
     </p:spTree>
     <p:extLst>
       <p:ext uri="{BB962C8B-B14F-4D97-AF65-F5344CB8AC3E}">
-        <p14:creationId xmlns:p14="http://schemas.microsoft.com/office/powerpoint/2010/main" val="509839460"/>
+        <p14:creationId xmlns:p14="http://schemas.microsoft.com/office/powerpoint/2010/main" val="1424213113"/>
       </p:ext>
     </p:extLst>
   </p:cSld>
@@ -10964,7 +11164,7 @@
           <p:cNvPr id="16" name="">
             <a:extLst xmlns:a="http://schemas.openxmlformats.org/drawingml/2006/main">
               <a:ext uri="{FF2B5EF4-FFF2-40B4-BE49-F238E27FC236}">
-                <a16:creationId xmlns:a16="http://schemas.microsoft.com/office/drawing/2014/main" id="{BB16A5BA-2D95-4CAB-891F-1587F2C39545}"/>
+                <a16:creationId xmlns:a16="http://schemas.microsoft.com/office/drawing/2014/main" id="{5C6A0346-568D-4B73-9D94-ADD690394281}"/>
               </a:ext>
             </a:extLst>
           </p:cNvPr>
@@ -10996,7 +11196,7 @@
           <p:cNvPr id="2" name="">
             <a:extLst xmlns:a="http://schemas.openxmlformats.org/drawingml/2006/main">
               <a:ext uri="{FF2B5EF4-FFF2-40B4-BE49-F238E27FC236}">
-                <a16:creationId xmlns:a16="http://schemas.microsoft.com/office/drawing/2014/main" id="{AC7E1305-533B-426B-B41E-A355D5180A88}"/>
+                <a16:creationId xmlns:a16="http://schemas.microsoft.com/office/drawing/2014/main" id="{D29123D2-FD16-4093-A9AC-03CE01CDF4F3}"/>
               </a:ext>
             </a:extLst>
           </p:cNvPr>
@@ -11053,7 +11253,7 @@
           <p:cNvPr id="3" name="">
             <a:extLst xmlns:a="http://schemas.openxmlformats.org/drawingml/2006/main">
               <a:ext uri="{FF2B5EF4-FFF2-40B4-BE49-F238E27FC236}">
-                <a16:creationId xmlns:a16="http://schemas.microsoft.com/office/drawing/2014/main" id="{09CCECD8-5E67-4D05-AEFF-8DFB865A7EF6}"/>
+                <a16:creationId xmlns:a16="http://schemas.microsoft.com/office/drawing/2014/main" id="{0545183E-AE9C-4D4F-93A0-900D507EEBF2}"/>
               </a:ext>
             </a:extLst>
           </p:cNvPr>
@@ -11085,7 +11285,7 @@
           <p:cNvPr id="4" name="">
             <a:extLst xmlns:a="http://schemas.openxmlformats.org/drawingml/2006/main">
               <a:ext uri="{FF2B5EF4-FFF2-40B4-BE49-F238E27FC236}">
-                <a16:creationId xmlns:a16="http://schemas.microsoft.com/office/drawing/2014/main" id="{09194D48-4B6C-44D7-9630-436B7B820FF4}"/>
+                <a16:creationId xmlns:a16="http://schemas.microsoft.com/office/drawing/2014/main" id="{CABB55EB-2D52-4A0A-B134-34D425B6DC67}"/>
               </a:ext>
             </a:extLst>
           </p:cNvPr>
@@ -11142,7 +11342,7 @@
           <p:cNvPr id="5" name="">
             <a:extLst xmlns:a="http://schemas.openxmlformats.org/drawingml/2006/main">
               <a:ext uri="{FF2B5EF4-FFF2-40B4-BE49-F238E27FC236}">
-                <a16:creationId xmlns:a16="http://schemas.microsoft.com/office/drawing/2014/main" id="{67BA227A-D575-47D1-84B6-D926A11DE62C}"/>
+                <a16:creationId xmlns:a16="http://schemas.microsoft.com/office/drawing/2014/main" id="{FC3AE729-32B4-4938-941D-E020AC05C65B}"/>
               </a:ext>
             </a:extLst>
           </p:cNvPr>
@@ -11199,7 +11399,7 @@
           <p:cNvPr id="6" name="">
             <a:extLst xmlns:a="http://schemas.openxmlformats.org/drawingml/2006/main">
               <a:ext uri="{FF2B5EF4-FFF2-40B4-BE49-F238E27FC236}">
-                <a16:creationId xmlns:a16="http://schemas.microsoft.com/office/drawing/2014/main" id="{7F9A8589-176F-4FB4-8984-3F5514DA80BA}"/>
+                <a16:creationId xmlns:a16="http://schemas.microsoft.com/office/drawing/2014/main" id="{9710EAEF-E586-472A-848E-F3C2FB7EB1CC}"/>
               </a:ext>
             </a:extLst>
           </p:cNvPr>
@@ -11256,7 +11456,7 @@
           <p:cNvPr id="7" name="">
             <a:extLst xmlns:a="http://schemas.openxmlformats.org/drawingml/2006/main">
               <a:ext uri="{FF2B5EF4-FFF2-40B4-BE49-F238E27FC236}">
-                <a16:creationId xmlns:a16="http://schemas.microsoft.com/office/drawing/2014/main" id="{5D077BC5-9A70-423A-BAFA-6B17167A1149}"/>
+                <a16:creationId xmlns:a16="http://schemas.microsoft.com/office/drawing/2014/main" id="{5DCA380D-042B-47E6-87A8-14473C201B52}"/>
               </a:ext>
             </a:extLst>
           </p:cNvPr>
@@ -11288,7 +11488,7 @@
           <p:cNvPr id="8" name="">
             <a:extLst xmlns:a="http://schemas.openxmlformats.org/drawingml/2006/main">
               <a:ext uri="{FF2B5EF4-FFF2-40B4-BE49-F238E27FC236}">
-                <a16:creationId xmlns:a16="http://schemas.microsoft.com/office/drawing/2014/main" id="{EBEDDEF4-41E9-438B-A3CD-075D98154CE7}"/>
+                <a16:creationId xmlns:a16="http://schemas.microsoft.com/office/drawing/2014/main" id="{8D56CAAD-F1BA-49A9-A8A5-F1D4018B9A8C}"/>
               </a:ext>
             </a:extLst>
           </p:cNvPr>
@@ -11345,7 +11545,7 @@
           <p:cNvPr id="9" name="">
             <a:extLst xmlns:a="http://schemas.openxmlformats.org/drawingml/2006/main">
               <a:ext uri="{FF2B5EF4-FFF2-40B4-BE49-F238E27FC236}">
-                <a16:creationId xmlns:a16="http://schemas.microsoft.com/office/drawing/2014/main" id="{E05570C8-7030-463F-A440-D2179426CE72}"/>
+                <a16:creationId xmlns:a16="http://schemas.microsoft.com/office/drawing/2014/main" id="{570AE846-5080-4CA1-8970-070FEDC8CF8D}"/>
               </a:ext>
             </a:extLst>
           </p:cNvPr>
@@ -11406,7 +11606,7 @@
           <p:nvPr/>
         </p:nvPicPr>
         <p:blipFill>
-          <a:blip xmlns:r="http://schemas.openxmlformats.org/officeDocument/2006/relationships" xmlns:a="http://schemas.openxmlformats.org/drawingml/2006/main" r:embed="Rf826ff532f6e413a"/>
+          <a:blip xmlns:r="http://schemas.openxmlformats.org/officeDocument/2006/relationships" xmlns:a="http://schemas.openxmlformats.org/drawingml/2006/main" r:embed="R2aed84102c61466a"/>
           <a:stretch xmlns:a="http://schemas.openxmlformats.org/drawingml/2006/main"/>
         </p:blipFill>
         <p:spPr>
@@ -11424,7 +11624,7 @@
           <p:cNvPr id="11" name="">
             <a:extLst xmlns:a="http://schemas.openxmlformats.org/drawingml/2006/main">
               <a:ext uri="{FF2B5EF4-FFF2-40B4-BE49-F238E27FC236}">
-                <a16:creationId xmlns:a16="http://schemas.microsoft.com/office/drawing/2014/main" id="{7233B519-CC0E-4F9A-B436-C237A8991DA7}"/>
+                <a16:creationId xmlns:a16="http://schemas.microsoft.com/office/drawing/2014/main" id="{59D3EDCF-5CD5-4E2A-9576-5D179FA77B36}"/>
               </a:ext>
             </a:extLst>
           </p:cNvPr>
@@ -11481,7 +11681,7 @@
           <p:cNvPr id="12" name="">
             <a:extLst xmlns:a="http://schemas.openxmlformats.org/drawingml/2006/main">
               <a:ext uri="{FF2B5EF4-FFF2-40B4-BE49-F238E27FC236}">
-                <a16:creationId xmlns:a16="http://schemas.microsoft.com/office/drawing/2014/main" id="{353B088E-E272-4BBE-B118-7468FE07CDC8}"/>
+                <a16:creationId xmlns:a16="http://schemas.microsoft.com/office/drawing/2014/main" id="{8CFA06FA-F3B1-465C-972E-8F44630EDD9C}"/>
               </a:ext>
             </a:extLst>
           </p:cNvPr>
@@ -11538,7 +11738,7 @@
           <p:cNvPr id="13" name="">
             <a:extLst xmlns:a="http://schemas.openxmlformats.org/drawingml/2006/main">
               <a:ext uri="{FF2B5EF4-FFF2-40B4-BE49-F238E27FC236}">
-                <a16:creationId xmlns:a16="http://schemas.microsoft.com/office/drawing/2014/main" id="{9524A350-C19C-4846-A0D1-E22F4C1E125B}"/>
+                <a16:creationId xmlns:a16="http://schemas.microsoft.com/office/drawing/2014/main" id="{2F08CF0E-4214-4820-89D1-6E35CAD59457}"/>
               </a:ext>
             </a:extLst>
           </p:cNvPr>
@@ -11570,7 +11770,7 @@
           <p:cNvPr id="14" name="">
             <a:extLst xmlns:a="http://schemas.openxmlformats.org/drawingml/2006/main">
               <a:ext uri="{FF2B5EF4-FFF2-40B4-BE49-F238E27FC236}">
-                <a16:creationId xmlns:a16="http://schemas.microsoft.com/office/drawing/2014/main" id="{6F7E9E22-E8C9-481C-BA78-1EA8CF755B60}"/>
+                <a16:creationId xmlns:a16="http://schemas.microsoft.com/office/drawing/2014/main" id="{9A18B46A-1815-4811-83B9-2A0877730B5D}"/>
               </a:ext>
             </a:extLst>
           </p:cNvPr>
@@ -11627,7 +11827,7 @@
           <p:cNvPr id="15" name="">
             <a:extLst xmlns:a="http://schemas.openxmlformats.org/drawingml/2006/main">
               <a:ext uri="{FF2B5EF4-FFF2-40B4-BE49-F238E27FC236}">
-                <a16:creationId xmlns:a16="http://schemas.microsoft.com/office/drawing/2014/main" id="{39703B9D-41E8-4858-983F-E3B534E3F1C2}"/>
+                <a16:creationId xmlns:a16="http://schemas.microsoft.com/office/drawing/2014/main" id="{1CE8FB07-12E7-406B-915C-5CB4FB93B427}"/>
               </a:ext>
             </a:extLst>
           </p:cNvPr>
@@ -11682,7 +11882,7 @@
     </p:spTree>
     <p:extLst>
       <p:ext uri="{BB962C8B-B14F-4D97-AF65-F5344CB8AC3E}">
-        <p14:creationId xmlns:p14="http://schemas.microsoft.com/office/powerpoint/2010/main" val="2013371697"/>
+        <p14:creationId xmlns:p14="http://schemas.microsoft.com/office/powerpoint/2010/main" val="510882719"/>
       </p:ext>
     </p:extLst>
   </p:cSld>
@@ -11837,7 +12037,7 @@
           <p:cNvPr id="23" name="">
             <a:extLst xmlns:a="http://schemas.openxmlformats.org/drawingml/2006/main">
               <a:ext uri="{FF2B5EF4-FFF2-40B4-BE49-F238E27FC236}">
-                <a16:creationId xmlns:a16="http://schemas.microsoft.com/office/drawing/2014/main" id="{910DAF74-67F2-4FB4-A568-28CBEEDA00FE}"/>
+                <a16:creationId xmlns:a16="http://schemas.microsoft.com/office/drawing/2014/main" id="{AF76C13A-9126-4A01-836D-6629E6E91B17}"/>
               </a:ext>
             </a:extLst>
           </p:cNvPr>
@@ -11869,7 +12069,7 @@
           <p:cNvPr id="2" name="">
             <a:extLst xmlns:a="http://schemas.openxmlformats.org/drawingml/2006/main">
               <a:ext uri="{FF2B5EF4-FFF2-40B4-BE49-F238E27FC236}">
-                <a16:creationId xmlns:a16="http://schemas.microsoft.com/office/drawing/2014/main" id="{831F9557-12E1-4C2D-AEB3-5DF02591B603}"/>
+                <a16:creationId xmlns:a16="http://schemas.microsoft.com/office/drawing/2014/main" id="{9E887950-40BA-4A68-8A21-0A88DE6F8FA2}"/>
               </a:ext>
             </a:extLst>
           </p:cNvPr>
@@ -11926,7 +12126,7 @@
           <p:cNvPr id="3" name="">
             <a:extLst xmlns:a="http://schemas.openxmlformats.org/drawingml/2006/main">
               <a:ext uri="{FF2B5EF4-FFF2-40B4-BE49-F238E27FC236}">
-                <a16:creationId xmlns:a16="http://schemas.microsoft.com/office/drawing/2014/main" id="{298DED9C-E87C-45E3-BF24-EDD637BF2B6A}"/>
+                <a16:creationId xmlns:a16="http://schemas.microsoft.com/office/drawing/2014/main" id="{3997FF1D-6ED7-41FE-80B1-0AC79E3483A8}"/>
               </a:ext>
             </a:extLst>
           </p:cNvPr>
@@ -11958,7 +12158,7 @@
           <p:cNvPr id="4" name="">
             <a:extLst xmlns:a="http://schemas.openxmlformats.org/drawingml/2006/main">
               <a:ext uri="{FF2B5EF4-FFF2-40B4-BE49-F238E27FC236}">
-                <a16:creationId xmlns:a16="http://schemas.microsoft.com/office/drawing/2014/main" id="{FA6C6728-5442-4B8E-A8D1-7DA3D838FE43}"/>
+                <a16:creationId xmlns:a16="http://schemas.microsoft.com/office/drawing/2014/main" id="{2ED7F7F1-79DB-48D0-BBB1-EA310F27EA46}"/>
               </a:ext>
             </a:extLst>
           </p:cNvPr>
@@ -12015,7 +12215,7 @@
           <p:cNvPr id="5" name="">
             <a:extLst xmlns:a="http://schemas.openxmlformats.org/drawingml/2006/main">
               <a:ext uri="{FF2B5EF4-FFF2-40B4-BE49-F238E27FC236}">
-                <a16:creationId xmlns:a16="http://schemas.microsoft.com/office/drawing/2014/main" id="{0CB9C5AE-CE83-42EE-91F7-5C122AE63D8A}"/>
+                <a16:creationId xmlns:a16="http://schemas.microsoft.com/office/drawing/2014/main" id="{36459373-227D-4968-82F4-896EDB1541CF}"/>
               </a:ext>
             </a:extLst>
           </p:cNvPr>
@@ -12072,7 +12272,7 @@
           <p:cNvPr id="6" name="">
             <a:extLst xmlns:a="http://schemas.openxmlformats.org/drawingml/2006/main">
               <a:ext uri="{FF2B5EF4-FFF2-40B4-BE49-F238E27FC236}">
-                <a16:creationId xmlns:a16="http://schemas.microsoft.com/office/drawing/2014/main" id="{F3769CD9-0EB6-4BFF-B9A1-43A466D1C396}"/>
+                <a16:creationId xmlns:a16="http://schemas.microsoft.com/office/drawing/2014/main" id="{FF4B9443-A98A-4BFC-8617-A16462C5264B}"/>
               </a:ext>
             </a:extLst>
           </p:cNvPr>
@@ -12129,7 +12329,7 @@
           <p:cNvPr id="7" name="">
             <a:extLst xmlns:a="http://schemas.openxmlformats.org/drawingml/2006/main">
               <a:ext uri="{FF2B5EF4-FFF2-40B4-BE49-F238E27FC236}">
-                <a16:creationId xmlns:a16="http://schemas.microsoft.com/office/drawing/2014/main" id="{86B4B398-F3D7-45B7-997D-830BF7FD79DE}"/>
+                <a16:creationId xmlns:a16="http://schemas.microsoft.com/office/drawing/2014/main" id="{2DAE6D15-ADF6-42C8-AC30-A6AF517297BC}"/>
               </a:ext>
             </a:extLst>
           </p:cNvPr>
@@ -12161,7 +12361,7 @@
           <p:cNvPr id="8" name="">
             <a:extLst xmlns:a="http://schemas.openxmlformats.org/drawingml/2006/main">
               <a:ext uri="{FF2B5EF4-FFF2-40B4-BE49-F238E27FC236}">
-                <a16:creationId xmlns:a16="http://schemas.microsoft.com/office/drawing/2014/main" id="{EFDE2308-3F93-4936-9CDC-5E50FD4E98E9}"/>
+                <a16:creationId xmlns:a16="http://schemas.microsoft.com/office/drawing/2014/main" id="{E241BFDB-60C3-4CF0-9911-07AC781FF095}"/>
               </a:ext>
             </a:extLst>
           </p:cNvPr>
@@ -12218,7 +12418,7 @@
           <p:cNvPr id="9" name="">
             <a:extLst xmlns:a="http://schemas.openxmlformats.org/drawingml/2006/main">
               <a:ext uri="{FF2B5EF4-FFF2-40B4-BE49-F238E27FC236}">
-                <a16:creationId xmlns:a16="http://schemas.microsoft.com/office/drawing/2014/main" id="{FF3AD47E-58B8-4009-A038-4C920AB5D160}"/>
+                <a16:creationId xmlns:a16="http://schemas.microsoft.com/office/drawing/2014/main" id="{3A3B9173-7031-44F5-8637-033AC1EBBE5E}"/>
               </a:ext>
             </a:extLst>
           </p:cNvPr>
@@ -12275,7 +12475,7 @@
           <p:cNvPr id="10" name="">
             <a:extLst xmlns:a="http://schemas.openxmlformats.org/drawingml/2006/main">
               <a:ext uri="{FF2B5EF4-FFF2-40B4-BE49-F238E27FC236}">
-                <a16:creationId xmlns:a16="http://schemas.microsoft.com/office/drawing/2014/main" id="{4630987F-67F5-4C4C-919D-36CEB97C4A12}"/>
+                <a16:creationId xmlns:a16="http://schemas.microsoft.com/office/drawing/2014/main" id="{EF648422-7F32-422A-B7F4-D1EE66B35649}"/>
               </a:ext>
             </a:extLst>
           </p:cNvPr>
@@ -12309,7 +12509,7 @@
           <p:cNvPr id="11" name="">
             <a:extLst xmlns:a="http://schemas.openxmlformats.org/drawingml/2006/main">
               <a:ext uri="{FF2B5EF4-FFF2-40B4-BE49-F238E27FC236}">
-                <a16:creationId xmlns:a16="http://schemas.microsoft.com/office/drawing/2014/main" id="{1D40D7F8-658E-4BC7-91A8-3699093088D5}"/>
+                <a16:creationId xmlns:a16="http://schemas.microsoft.com/office/drawing/2014/main" id="{DD56DB34-2B54-4530-9860-045A40D420A8}"/>
               </a:ext>
             </a:extLst>
           </p:cNvPr>
@@ -12341,7 +12541,7 @@
           <p:cNvPr id="12" name="">
             <a:extLst xmlns:a="http://schemas.openxmlformats.org/drawingml/2006/main">
               <a:ext uri="{FF2B5EF4-FFF2-40B4-BE49-F238E27FC236}">
-                <a16:creationId xmlns:a16="http://schemas.microsoft.com/office/drawing/2014/main" id="{3887A05F-643F-4397-BE8E-32682E20D250}"/>
+                <a16:creationId xmlns:a16="http://schemas.microsoft.com/office/drawing/2014/main" id="{F8E56B62-6B50-487C-AC6B-0A1489A76437}"/>
               </a:ext>
             </a:extLst>
           </p:cNvPr>
@@ -12398,7 +12598,7 @@
           <p:cNvPr id="13" name="">
             <a:extLst xmlns:a="http://schemas.openxmlformats.org/drawingml/2006/main">
               <a:ext uri="{FF2B5EF4-FFF2-40B4-BE49-F238E27FC236}">
-                <a16:creationId xmlns:a16="http://schemas.microsoft.com/office/drawing/2014/main" id="{56C4B9F8-AD5C-498A-A31F-812CD991136C}"/>
+                <a16:creationId xmlns:a16="http://schemas.microsoft.com/office/drawing/2014/main" id="{D9AF9D6C-B90E-4A44-AC6C-8AA3D7CDB90D}"/>
               </a:ext>
             </a:extLst>
           </p:cNvPr>
@@ -12455,7 +12655,7 @@
           <p:cNvPr id="14" name="">
             <a:extLst xmlns:a="http://schemas.openxmlformats.org/drawingml/2006/main">
               <a:ext uri="{FF2B5EF4-FFF2-40B4-BE49-F238E27FC236}">
-                <a16:creationId xmlns:a16="http://schemas.microsoft.com/office/drawing/2014/main" id="{3B77346E-02EC-49AE-91AF-AABB161482E8}"/>
+                <a16:creationId xmlns:a16="http://schemas.microsoft.com/office/drawing/2014/main" id="{716843E0-4503-4B6A-AE66-B3110D45E57F}"/>
               </a:ext>
             </a:extLst>
           </p:cNvPr>
@@ -12489,7 +12689,7 @@
           <p:cNvPr id="15" name="">
             <a:extLst xmlns:a="http://schemas.openxmlformats.org/drawingml/2006/main">
               <a:ext uri="{FF2B5EF4-FFF2-40B4-BE49-F238E27FC236}">
-                <a16:creationId xmlns:a16="http://schemas.microsoft.com/office/drawing/2014/main" id="{8D8AAAF0-E2F0-44F9-AC2E-E188CC82FAFD}"/>
+                <a16:creationId xmlns:a16="http://schemas.microsoft.com/office/drawing/2014/main" id="{DAC3E1CA-9ABE-4084-A1FD-6070DF8A8E25}"/>
               </a:ext>
             </a:extLst>
           </p:cNvPr>
@@ -12521,7 +12721,7 @@
           <p:cNvPr id="16" name="">
             <a:extLst xmlns:a="http://schemas.openxmlformats.org/drawingml/2006/main">
               <a:ext uri="{FF2B5EF4-FFF2-40B4-BE49-F238E27FC236}">
-                <a16:creationId xmlns:a16="http://schemas.microsoft.com/office/drawing/2014/main" id="{F370C99B-753F-4D27-8371-D0D5180AC2A1}"/>
+                <a16:creationId xmlns:a16="http://schemas.microsoft.com/office/drawing/2014/main" id="{2F14EC03-63B0-48FD-9DE6-F1C838ADDEFA}"/>
               </a:ext>
             </a:extLst>
           </p:cNvPr>
@@ -12578,7 +12778,7 @@
           <p:cNvPr id="17" name="">
             <a:extLst xmlns:a="http://schemas.openxmlformats.org/drawingml/2006/main">
               <a:ext uri="{FF2B5EF4-FFF2-40B4-BE49-F238E27FC236}">
-                <a16:creationId xmlns:a16="http://schemas.microsoft.com/office/drawing/2014/main" id="{40DEFFBC-C398-42F2-B692-2BCA8A45EDD2}"/>
+                <a16:creationId xmlns:a16="http://schemas.microsoft.com/office/drawing/2014/main" id="{46BF6D55-D8A1-43D4-BC2B-959E3D60EC99}"/>
               </a:ext>
             </a:extLst>
           </p:cNvPr>
@@ -12635,7 +12835,7 @@
           <p:cNvPr id="18" name="">
             <a:extLst xmlns:a="http://schemas.openxmlformats.org/drawingml/2006/main">
               <a:ext uri="{FF2B5EF4-FFF2-40B4-BE49-F238E27FC236}">
-                <a16:creationId xmlns:a16="http://schemas.microsoft.com/office/drawing/2014/main" id="{2DC5614A-310C-47B0-9087-770B3C4772BB}"/>
+                <a16:creationId xmlns:a16="http://schemas.microsoft.com/office/drawing/2014/main" id="{1C9F9657-BC7E-43B7-9156-EA700FEA9F22}"/>
               </a:ext>
             </a:extLst>
           </p:cNvPr>
@@ -12669,7 +12869,7 @@
           <p:cNvPr id="19" name="">
             <a:extLst xmlns:a="http://schemas.openxmlformats.org/drawingml/2006/main">
               <a:ext uri="{FF2B5EF4-FFF2-40B4-BE49-F238E27FC236}">
-                <a16:creationId xmlns:a16="http://schemas.microsoft.com/office/drawing/2014/main" id="{B458F684-6AF6-4CED-B352-CE32D7F4D38A}"/>
+                <a16:creationId xmlns:a16="http://schemas.microsoft.com/office/drawing/2014/main" id="{A3400858-120C-4C28-80C0-152A29704379}"/>
               </a:ext>
             </a:extLst>
           </p:cNvPr>
@@ -12701,7 +12901,7 @@
           <p:cNvPr id="20" name="">
             <a:extLst xmlns:a="http://schemas.openxmlformats.org/drawingml/2006/main">
               <a:ext uri="{FF2B5EF4-FFF2-40B4-BE49-F238E27FC236}">
-                <a16:creationId xmlns:a16="http://schemas.microsoft.com/office/drawing/2014/main" id="{20A70B4B-E14C-4B5E-AD83-3866FC0D46CD}"/>
+                <a16:creationId xmlns:a16="http://schemas.microsoft.com/office/drawing/2014/main" id="{CBD3D3CA-7E22-43F7-86E0-02AF08A00B00}"/>
               </a:ext>
             </a:extLst>
           </p:cNvPr>
@@ -12758,7 +12958,7 @@
           <p:cNvPr id="21" name="">
             <a:extLst xmlns:a="http://schemas.openxmlformats.org/drawingml/2006/main">
               <a:ext uri="{FF2B5EF4-FFF2-40B4-BE49-F238E27FC236}">
-                <a16:creationId xmlns:a16="http://schemas.microsoft.com/office/drawing/2014/main" id="{D680C145-C3C8-4D7D-8257-B9A7F7141DEE}"/>
+                <a16:creationId xmlns:a16="http://schemas.microsoft.com/office/drawing/2014/main" id="{8D26825E-3781-4AA7-8678-1EE5B0BB907B}"/>
               </a:ext>
             </a:extLst>
           </p:cNvPr>
@@ -12815,7 +13015,7 @@
           <p:cNvPr id="22" name="">
             <a:extLst xmlns:a="http://schemas.openxmlformats.org/drawingml/2006/main">
               <a:ext uri="{FF2B5EF4-FFF2-40B4-BE49-F238E27FC236}">
-                <a16:creationId xmlns:a16="http://schemas.microsoft.com/office/drawing/2014/main" id="{2939AFE5-8362-4EE5-BD5B-BCA56D9F9E2D}"/>
+                <a16:creationId xmlns:a16="http://schemas.microsoft.com/office/drawing/2014/main" id="{150B6B88-0743-4D52-99D4-AF49D3964942}"/>
               </a:ext>
             </a:extLst>
           </p:cNvPr>
@@ -12870,7 +13070,7 @@
     </p:spTree>
     <p:extLst>
       <p:ext uri="{BB962C8B-B14F-4D97-AF65-F5344CB8AC3E}">
-        <p14:creationId xmlns:p14="http://schemas.microsoft.com/office/powerpoint/2010/main" val="2019198523"/>
+        <p14:creationId xmlns:p14="http://schemas.microsoft.com/office/powerpoint/2010/main" val="1343826996"/>
       </p:ext>
     </p:extLst>
   </p:cSld>
@@ -13071,7 +13271,7 @@
           <p:cNvPr id="22" name="">
             <a:extLst xmlns:a="http://schemas.openxmlformats.org/drawingml/2006/main">
               <a:ext uri="{FF2B5EF4-FFF2-40B4-BE49-F238E27FC236}">
-                <a16:creationId xmlns:a16="http://schemas.microsoft.com/office/drawing/2014/main" id="{6654EF0D-E678-4CF4-835F-55F47A192394}"/>
+                <a16:creationId xmlns:a16="http://schemas.microsoft.com/office/drawing/2014/main" id="{79205212-BE8E-420B-AD13-E4FFDC1FEB55}"/>
               </a:ext>
             </a:extLst>
           </p:cNvPr>
@@ -13103,7 +13303,7 @@
           <p:cNvPr id="2" name="">
             <a:extLst xmlns:a="http://schemas.openxmlformats.org/drawingml/2006/main">
               <a:ext uri="{FF2B5EF4-FFF2-40B4-BE49-F238E27FC236}">
-                <a16:creationId xmlns:a16="http://schemas.microsoft.com/office/drawing/2014/main" id="{1A6E71DF-D5CC-4D0D-B487-0E7840E1F27D}"/>
+                <a16:creationId xmlns:a16="http://schemas.microsoft.com/office/drawing/2014/main" id="{BB556A61-436E-43CF-AB96-4EF3C23AA923}"/>
               </a:ext>
             </a:extLst>
           </p:cNvPr>
@@ -13160,7 +13360,7 @@
           <p:cNvPr id="3" name="">
             <a:extLst xmlns:a="http://schemas.openxmlformats.org/drawingml/2006/main">
               <a:ext uri="{FF2B5EF4-FFF2-40B4-BE49-F238E27FC236}">
-                <a16:creationId xmlns:a16="http://schemas.microsoft.com/office/drawing/2014/main" id="{54C5353F-B796-4682-BF71-540FBCAFB933}"/>
+                <a16:creationId xmlns:a16="http://schemas.microsoft.com/office/drawing/2014/main" id="{4F52935A-6BFB-4061-A909-333C9846C9C2}"/>
               </a:ext>
             </a:extLst>
           </p:cNvPr>
@@ -13192,7 +13392,7 @@
           <p:cNvPr id="4" name="">
             <a:extLst xmlns:a="http://schemas.openxmlformats.org/drawingml/2006/main">
               <a:ext uri="{FF2B5EF4-FFF2-40B4-BE49-F238E27FC236}">
-                <a16:creationId xmlns:a16="http://schemas.microsoft.com/office/drawing/2014/main" id="{3C3608B2-7E47-4141-B04A-157148668672}"/>
+                <a16:creationId xmlns:a16="http://schemas.microsoft.com/office/drawing/2014/main" id="{3584732F-E928-460E-B3CC-3A2947356596}"/>
               </a:ext>
             </a:extLst>
           </p:cNvPr>
@@ -13249,7 +13449,7 @@
           <p:cNvPr id="5" name="">
             <a:extLst xmlns:a="http://schemas.openxmlformats.org/drawingml/2006/main">
               <a:ext uri="{FF2B5EF4-FFF2-40B4-BE49-F238E27FC236}">
-                <a16:creationId xmlns:a16="http://schemas.microsoft.com/office/drawing/2014/main" id="{852BE372-242D-4C07-A6D9-5E399D15C4DD}"/>
+                <a16:creationId xmlns:a16="http://schemas.microsoft.com/office/drawing/2014/main" id="{643C1ED4-C580-4E28-AD23-8A3520DCFC98}"/>
               </a:ext>
             </a:extLst>
           </p:cNvPr>
@@ -13306,7 +13506,7 @@
           <p:cNvPr id="6" name="">
             <a:extLst xmlns:a="http://schemas.openxmlformats.org/drawingml/2006/main">
               <a:ext uri="{FF2B5EF4-FFF2-40B4-BE49-F238E27FC236}">
-                <a16:creationId xmlns:a16="http://schemas.microsoft.com/office/drawing/2014/main" id="{2E0DE124-B25A-4053-9F16-07333CC27DFE}"/>
+                <a16:creationId xmlns:a16="http://schemas.microsoft.com/office/drawing/2014/main" id="{30399C4D-31BE-492E-9677-650FE9FA1DD6}"/>
               </a:ext>
             </a:extLst>
           </p:cNvPr>
@@ -13363,7 +13563,7 @@
           <p:cNvPr id="7" name="">
             <a:extLst xmlns:a="http://schemas.openxmlformats.org/drawingml/2006/main">
               <a:ext uri="{FF2B5EF4-FFF2-40B4-BE49-F238E27FC236}">
-                <a16:creationId xmlns:a16="http://schemas.microsoft.com/office/drawing/2014/main" id="{23E2AFDE-E496-4E30-9266-9F16A2888FA6}"/>
+                <a16:creationId xmlns:a16="http://schemas.microsoft.com/office/drawing/2014/main" id="{5A078580-F83C-46AE-B34C-43D39BEA9473}"/>
               </a:ext>
             </a:extLst>
           </p:cNvPr>
@@ -13395,7 +13595,7 @@
           <p:cNvPr id="8" name="">
             <a:extLst xmlns:a="http://schemas.openxmlformats.org/drawingml/2006/main">
               <a:ext uri="{FF2B5EF4-FFF2-40B4-BE49-F238E27FC236}">
-                <a16:creationId xmlns:a16="http://schemas.microsoft.com/office/drawing/2014/main" id="{1FAFE998-1B18-457F-8CBB-F63C5A4FDB4A}"/>
+                <a16:creationId xmlns:a16="http://schemas.microsoft.com/office/drawing/2014/main" id="{206A8481-30BA-472D-BF4C-BD4320183227}"/>
               </a:ext>
             </a:extLst>
           </p:cNvPr>
@@ -13452,7 +13652,7 @@
           <p:cNvPr id="9" name="">
             <a:extLst xmlns:a="http://schemas.openxmlformats.org/drawingml/2006/main">
               <a:ext uri="{FF2B5EF4-FFF2-40B4-BE49-F238E27FC236}">
-                <a16:creationId xmlns:a16="http://schemas.microsoft.com/office/drawing/2014/main" id="{F89C43E4-77CE-40D4-982C-39FFF4931BDE}"/>
+                <a16:creationId xmlns:a16="http://schemas.microsoft.com/office/drawing/2014/main" id="{07FEC4D7-7588-4529-AAE6-DAADC0654DE9}"/>
               </a:ext>
             </a:extLst>
           </p:cNvPr>
@@ -13509,7 +13709,7 @@
           <p:cNvPr id="10" name="">
             <a:extLst xmlns:a="http://schemas.openxmlformats.org/drawingml/2006/main">
               <a:ext uri="{FF2B5EF4-FFF2-40B4-BE49-F238E27FC236}">
-                <a16:creationId xmlns:a16="http://schemas.microsoft.com/office/drawing/2014/main" id="{D7252406-1389-4F47-B88A-5B749B0C0E32}"/>
+                <a16:creationId xmlns:a16="http://schemas.microsoft.com/office/drawing/2014/main" id="{6750F981-D5BE-4371-903B-7677455A26AE}"/>
               </a:ext>
             </a:extLst>
           </p:cNvPr>
@@ -13543,7 +13743,7 @@
           <p:cNvPr id="11" name="">
             <a:extLst xmlns:a="http://schemas.openxmlformats.org/drawingml/2006/main">
               <a:ext uri="{FF2B5EF4-FFF2-40B4-BE49-F238E27FC236}">
-                <a16:creationId xmlns:a16="http://schemas.microsoft.com/office/drawing/2014/main" id="{5A0AF149-13EF-487F-A6BE-AEDAAE791C90}"/>
+                <a16:creationId xmlns:a16="http://schemas.microsoft.com/office/drawing/2014/main" id="{E5B1CA64-7026-4DD3-BECE-367D99EECC08}"/>
               </a:ext>
             </a:extLst>
           </p:cNvPr>
@@ -13575,7 +13775,7 @@
           <p:cNvPr id="12" name="">
             <a:extLst xmlns:a="http://schemas.openxmlformats.org/drawingml/2006/main">
               <a:ext uri="{FF2B5EF4-FFF2-40B4-BE49-F238E27FC236}">
-                <a16:creationId xmlns:a16="http://schemas.microsoft.com/office/drawing/2014/main" id="{F63602B0-38D9-4050-AE97-CDE38EA5C8E8}"/>
+                <a16:creationId xmlns:a16="http://schemas.microsoft.com/office/drawing/2014/main" id="{601A8072-2F52-45D1-A545-3DDC61BFA91B}"/>
               </a:ext>
             </a:extLst>
           </p:cNvPr>
@@ -13632,7 +13832,7 @@
           <p:cNvPr id="13" name="">
             <a:extLst xmlns:a="http://schemas.openxmlformats.org/drawingml/2006/main">
               <a:ext uri="{FF2B5EF4-FFF2-40B4-BE49-F238E27FC236}">
-                <a16:creationId xmlns:a16="http://schemas.microsoft.com/office/drawing/2014/main" id="{1D420BA6-9220-43B4-9599-635452367971}"/>
+                <a16:creationId xmlns:a16="http://schemas.microsoft.com/office/drawing/2014/main" id="{EAB01693-6F35-450D-AE43-2D2F68936BBD}"/>
               </a:ext>
             </a:extLst>
           </p:cNvPr>
@@ -13689,7 +13889,7 @@
           <p:cNvPr id="14" name="">
             <a:extLst xmlns:a="http://schemas.openxmlformats.org/drawingml/2006/main">
               <a:ext uri="{FF2B5EF4-FFF2-40B4-BE49-F238E27FC236}">
-                <a16:creationId xmlns:a16="http://schemas.microsoft.com/office/drawing/2014/main" id="{79E567A8-EFAC-4B75-8B8F-435F9E694CB1}"/>
+                <a16:creationId xmlns:a16="http://schemas.microsoft.com/office/drawing/2014/main" id="{CEF704DF-E181-446D-8A39-96B68B37B21D}"/>
               </a:ext>
             </a:extLst>
           </p:cNvPr>
@@ -13723,7 +13923,7 @@
           <p:cNvPr id="15" name="">
             <a:extLst xmlns:a="http://schemas.openxmlformats.org/drawingml/2006/main">
               <a:ext uri="{FF2B5EF4-FFF2-40B4-BE49-F238E27FC236}">
-                <a16:creationId xmlns:a16="http://schemas.microsoft.com/office/drawing/2014/main" id="{ADED71CA-C0E8-4987-A937-5E21E57BDCFA}"/>
+                <a16:creationId xmlns:a16="http://schemas.microsoft.com/office/drawing/2014/main" id="{D6601CED-49F4-48E0-994A-5B95A5BCD197}"/>
               </a:ext>
             </a:extLst>
           </p:cNvPr>
@@ -13755,7 +13955,7 @@
           <p:cNvPr id="16" name="">
             <a:extLst xmlns:a="http://schemas.openxmlformats.org/drawingml/2006/main">
               <a:ext uri="{FF2B5EF4-FFF2-40B4-BE49-F238E27FC236}">
-                <a16:creationId xmlns:a16="http://schemas.microsoft.com/office/drawing/2014/main" id="{7490CB46-B9A3-459F-83E1-1EEC33E76CE7}"/>
+                <a16:creationId xmlns:a16="http://schemas.microsoft.com/office/drawing/2014/main" id="{8ADB0EAB-3E09-463A-9BD8-1808AFFFFD4A}"/>
               </a:ext>
             </a:extLst>
           </p:cNvPr>
@@ -13812,7 +14012,7 @@
           <p:cNvPr id="17" name="">
             <a:extLst xmlns:a="http://schemas.openxmlformats.org/drawingml/2006/main">
               <a:ext uri="{FF2B5EF4-FFF2-40B4-BE49-F238E27FC236}">
-                <a16:creationId xmlns:a16="http://schemas.microsoft.com/office/drawing/2014/main" id="{A0C9B789-3653-4905-8292-883C99C01294}"/>
+                <a16:creationId xmlns:a16="http://schemas.microsoft.com/office/drawing/2014/main" id="{65FA98F6-D87B-4314-941A-5D06B9BA3220}"/>
               </a:ext>
             </a:extLst>
           </p:cNvPr>
@@ -13869,7 +14069,7 @@
           <p:cNvPr id="18" name="">
             <a:extLst xmlns:a="http://schemas.openxmlformats.org/drawingml/2006/main">
               <a:ext uri="{FF2B5EF4-FFF2-40B4-BE49-F238E27FC236}">
-                <a16:creationId xmlns:a16="http://schemas.microsoft.com/office/drawing/2014/main" id="{D3FEE1CC-4EF8-4332-ACD1-13DAF9252536}"/>
+                <a16:creationId xmlns:a16="http://schemas.microsoft.com/office/drawing/2014/main" id="{6EE0AA31-A9C5-4A5B-9636-83933B3941EA}"/>
               </a:ext>
             </a:extLst>
           </p:cNvPr>
@@ -13903,7 +14103,7 @@
           <p:cNvPr id="19" name="">
             <a:extLst xmlns:a="http://schemas.openxmlformats.org/drawingml/2006/main">
               <a:ext uri="{FF2B5EF4-FFF2-40B4-BE49-F238E27FC236}">
-                <a16:creationId xmlns:a16="http://schemas.microsoft.com/office/drawing/2014/main" id="{83F32A41-3AAA-48F4-AD0D-E219376B0B52}"/>
+                <a16:creationId xmlns:a16="http://schemas.microsoft.com/office/drawing/2014/main" id="{6E5A1A5B-26F3-4244-8F26-983274695104}"/>
               </a:ext>
             </a:extLst>
           </p:cNvPr>
@@ -13935,7 +14135,7 @@
           <p:cNvPr id="20" name="">
             <a:extLst xmlns:a="http://schemas.openxmlformats.org/drawingml/2006/main">
               <a:ext uri="{FF2B5EF4-FFF2-40B4-BE49-F238E27FC236}">
-                <a16:creationId xmlns:a16="http://schemas.microsoft.com/office/drawing/2014/main" id="{38794743-B978-4E17-9B3C-F004050CA68F}"/>
+                <a16:creationId xmlns:a16="http://schemas.microsoft.com/office/drawing/2014/main" id="{A0CED4D7-A216-4058-ABDA-B6DBA48FB69F}"/>
               </a:ext>
             </a:extLst>
           </p:cNvPr>
@@ -13992,7 +14192,7 @@
           <p:cNvPr id="21" name="">
             <a:extLst xmlns:a="http://schemas.openxmlformats.org/drawingml/2006/main">
               <a:ext uri="{FF2B5EF4-FFF2-40B4-BE49-F238E27FC236}">
-                <a16:creationId xmlns:a16="http://schemas.microsoft.com/office/drawing/2014/main" id="{DAAD6FFB-A516-478C-90DE-3514AFDBB7D0}"/>
+                <a16:creationId xmlns:a16="http://schemas.microsoft.com/office/drawing/2014/main" id="{D1FF955E-2F56-4729-9C20-F416E0E58E78}"/>
               </a:ext>
             </a:extLst>
           </p:cNvPr>
@@ -14047,7 +14247,7 @@
     </p:spTree>
     <p:extLst>
       <p:ext uri="{BB962C8B-B14F-4D97-AF65-F5344CB8AC3E}">
-        <p14:creationId xmlns:p14="http://schemas.microsoft.com/office/powerpoint/2010/main" val="1624684480"/>
+        <p14:creationId xmlns:p14="http://schemas.microsoft.com/office/powerpoint/2010/main" val="246134657"/>
       </p:ext>
     </p:extLst>
   </p:cSld>
